--- a/public/fun/pack/pptx/family/가족소개_10_반려동물과함께_어버이날꽃.pptx
+++ b/public/fun/pack/pptx/family/가족소개_10_반려동물과함께_어버이날꽃.pptx
@@ -3347,7 +3347,7 @@
             <a:r>
               <a:rPr sz="3600" b="1" i="0">
                 <a:solidFill>
-                  <a:srgbClr val="7A1F2E"/>
+                  <a:srgbClr val="721D2B"/>
                 </a:solidFill>
               </a:rPr>
               <a:t>우리 가족을 소개합니다</a:t>
@@ -3385,7 +3385,7 @@
             <a:r>
               <a:rPr sz="1700" b="0" i="1">
                 <a:solidFill>
-                  <a:srgbClr val="7A1F2E"/>
+                  <a:srgbClr val="721D2B"/>
                 </a:solidFill>
               </a:rPr>
               <a:t>어버이날 꽃 옆에서 한 장</a:t>
@@ -3445,7 +3445,7 @@
     <p:bg>
       <p:bgPr>
         <a:solidFill>
-          <a:srgbClr val="FBEFF1"/>
+          <a:srgbClr val="FCF3F4"/>
         </a:solidFill>
         <a:effectLst/>
       </p:bgPr>
@@ -3474,7 +3474,7 @@
           <a:noFill/>
           <a:ln w="28575">
             <a:solidFill>
-              <a:srgbClr val="CC334D"/>
+              <a:srgbClr val="DF3A55"/>
             </a:solidFill>
           </a:ln>
         </p:spPr>
@@ -3503,7 +3503,7 @@
           <a:noFill/>
           <a:ln w="9525">
             <a:solidFill>
-              <a:srgbClr val="F4CDD3"/>
+              <a:srgbClr val="F7D4DA"/>
             </a:solidFill>
           </a:ln>
         </p:spPr>
@@ -3545,7 +3545,7 @@
             <a:r>
               <a:rPr sz="3000" b="1" i="0">
                 <a:solidFill>
-                  <a:srgbClr val="7A1F2E"/>
+                  <a:srgbClr val="721D2B"/>
                 </a:solidFill>
               </a:rPr>
               <a:t>가족 구성원</a:t>
@@ -3568,11 +3568,11 @@
             <a:avLst/>
           </a:prstGeom>
           <a:solidFill>
-            <a:srgbClr val="F4CDD3"/>
+            <a:srgbClr val="F7D4DA"/>
           </a:solidFill>
           <a:ln w="19050">
             <a:solidFill>
-              <a:srgbClr val="CC334D"/>
+              <a:srgbClr val="DF3A55"/>
             </a:solidFill>
             <a:prstDash val="dash"/>
           </a:ln>
@@ -3591,7 +3591,7 @@
             <a:r>
               <a:rPr sz="1200" b="0" i="0">
                 <a:solidFill>
-                  <a:srgbClr val="7A1F2E"/>
+                  <a:srgbClr val="721D2B"/>
                 </a:solidFill>
               </a:rPr>
               <a:t>사진</a:t>
@@ -3629,7 +3629,7 @@
             <a:r>
               <a:rPr sz="1600" b="1" i="0">
                 <a:solidFill>
-                  <a:srgbClr val="7A1F2E"/>
+                  <a:srgbClr val="721D2B"/>
                 </a:solidFill>
               </a:rPr>
               <a:t>보호자 1</a:t>
@@ -3720,11 +3720,11 @@
             <a:avLst/>
           </a:prstGeom>
           <a:solidFill>
-            <a:srgbClr val="F4CDD3"/>
+            <a:srgbClr val="F7D4DA"/>
           </a:solidFill>
           <a:ln w="19050">
             <a:solidFill>
-              <a:srgbClr val="CC334D"/>
+              <a:srgbClr val="DF3A55"/>
             </a:solidFill>
             <a:prstDash val="dash"/>
           </a:ln>
@@ -3743,7 +3743,7 @@
             <a:r>
               <a:rPr sz="1200" b="0" i="0">
                 <a:solidFill>
-                  <a:srgbClr val="7A1F2E"/>
+                  <a:srgbClr val="721D2B"/>
                 </a:solidFill>
               </a:rPr>
               <a:t>사진</a:t>
@@ -3781,7 +3781,7 @@
             <a:r>
               <a:rPr sz="1600" b="1" i="0">
                 <a:solidFill>
-                  <a:srgbClr val="7A1F2E"/>
+                  <a:srgbClr val="721D2B"/>
                 </a:solidFill>
               </a:rPr>
               <a:t>보호자 2</a:t>
@@ -3872,11 +3872,11 @@
             <a:avLst/>
           </a:prstGeom>
           <a:solidFill>
-            <a:srgbClr val="F4CDD3"/>
+            <a:srgbClr val="F7D4DA"/>
           </a:solidFill>
           <a:ln w="19050">
             <a:solidFill>
-              <a:srgbClr val="CC334D"/>
+              <a:srgbClr val="DF3A55"/>
             </a:solidFill>
             <a:prstDash val="dash"/>
           </a:ln>
@@ -3895,7 +3895,7 @@
             <a:r>
               <a:rPr sz="1200" b="0" i="0">
                 <a:solidFill>
-                  <a:srgbClr val="7A1F2E"/>
+                  <a:srgbClr val="721D2B"/>
                 </a:solidFill>
               </a:rPr>
               <a:t>사진</a:t>
@@ -3933,7 +3933,7 @@
             <a:r>
               <a:rPr sz="1600" b="1" i="0">
                 <a:solidFill>
-                  <a:srgbClr val="7A1F2E"/>
+                  <a:srgbClr val="721D2B"/>
                 </a:solidFill>
               </a:rPr>
               <a:t>우리 반려동물</a:t>
@@ -4023,7 +4023,7 @@
     <p:bg>
       <p:bgPr>
         <a:solidFill>
-          <a:srgbClr val="FBEFF1"/>
+          <a:srgbClr val="FCF3F4"/>
         </a:solidFill>
         <a:effectLst/>
       </p:bgPr>
@@ -4052,7 +4052,7 @@
           <a:noFill/>
           <a:ln w="28575">
             <a:solidFill>
-              <a:srgbClr val="CC334D"/>
+              <a:srgbClr val="DF3A55"/>
             </a:solidFill>
           </a:ln>
         </p:spPr>
@@ -4081,7 +4081,7 @@
           <a:noFill/>
           <a:ln w="9525">
             <a:solidFill>
-              <a:srgbClr val="F4CDD3"/>
+              <a:srgbClr val="F7D4DA"/>
             </a:solidFill>
           </a:ln>
         </p:spPr>
@@ -4123,7 +4123,7 @@
             <a:r>
               <a:rPr sz="3000" b="1" i="0">
                 <a:solidFill>
-                  <a:srgbClr val="7A1F2E"/>
+                  <a:srgbClr val="721D2B"/>
                 </a:solidFill>
               </a:rPr>
               <a:t>우리 가족 이야기</a:t>
@@ -4146,7 +4146,7 @@
             <a:avLst/>
           </a:prstGeom>
           <a:solidFill>
-            <a:srgbClr val="F4CDD3"/>
+            <a:srgbClr val="F7D4DA"/>
           </a:solidFill>
           <a:ln>
             <a:noFill/>
@@ -4175,7 +4175,7 @@
             <a:avLst/>
           </a:prstGeom>
           <a:solidFill>
-            <a:srgbClr val="CC334D"/>
+            <a:srgbClr val="DF3A55"/>
           </a:solidFill>
           <a:ln w="38100">
             <a:solidFill>
@@ -4221,7 +4221,7 @@
             <a:r>
               <a:rPr sz="1600" b="1" i="0">
                 <a:solidFill>
-                  <a:srgbClr val="CC334D"/>
+                  <a:srgbClr val="DF3A55"/>
                 </a:solidFill>
               </a:rPr>
               <a:t>처음 만난 날</a:t>
@@ -4259,7 +4259,7 @@
             <a:r>
               <a:rPr sz="1800" b="1" i="0">
                 <a:solidFill>
-                  <a:srgbClr val="7A1F2E"/>
+                  <a:srgbClr val="721D2B"/>
                 </a:solidFill>
               </a:rPr>
               <a:t>우리의 인연</a:t>
@@ -4320,7 +4320,7 @@
             <a:avLst/>
           </a:prstGeom>
           <a:solidFill>
-            <a:srgbClr val="CC334D"/>
+            <a:srgbClr val="DF3A55"/>
           </a:solidFill>
           <a:ln w="38100">
             <a:solidFill>
@@ -4366,7 +4366,7 @@
             <a:r>
               <a:rPr sz="1600" b="1" i="0">
                 <a:solidFill>
-                  <a:srgbClr val="CC334D"/>
+                  <a:srgbClr val="DF3A55"/>
                 </a:solidFill>
               </a:rPr>
               <a:t>첫 산책</a:t>
@@ -4404,7 +4404,7 @@
             <a:r>
               <a:rPr sz="1800" b="1" i="0">
                 <a:solidFill>
-                  <a:srgbClr val="7A1F2E"/>
+                  <a:srgbClr val="721D2B"/>
                 </a:solidFill>
               </a:rPr>
               <a:t>함께한 첫 걸음</a:t>
@@ -4465,7 +4465,7 @@
             <a:avLst/>
           </a:prstGeom>
           <a:solidFill>
-            <a:srgbClr val="CC334D"/>
+            <a:srgbClr val="DF3A55"/>
           </a:solidFill>
           <a:ln w="38100">
             <a:solidFill>
@@ -4511,7 +4511,7 @@
             <a:r>
               <a:rPr sz="1600" b="1" i="0">
                 <a:solidFill>
-                  <a:srgbClr val="CC334D"/>
+                  <a:srgbClr val="DF3A55"/>
                 </a:solidFill>
               </a:rPr>
               <a:t>가장 웃었던 날</a:t>
@@ -4549,7 +4549,7 @@
             <a:r>
               <a:rPr sz="1800" b="1" i="0">
                 <a:solidFill>
-                  <a:srgbClr val="7A1F2E"/>
+                  <a:srgbClr val="721D2B"/>
                 </a:solidFill>
               </a:rPr>
               <a:t>잊지 못할 순간</a:t>
@@ -4610,7 +4610,7 @@
             <a:avLst/>
           </a:prstGeom>
           <a:solidFill>
-            <a:srgbClr val="CC334D"/>
+            <a:srgbClr val="DF3A55"/>
           </a:solidFill>
           <a:ln w="38100">
             <a:solidFill>
@@ -4656,7 +4656,7 @@
             <a:r>
               <a:rPr sz="1600" b="1" i="0">
                 <a:solidFill>
-                  <a:srgbClr val="CC334D"/>
+                  <a:srgbClr val="DF3A55"/>
                 </a:solidFill>
               </a:rPr>
               <a:t>지금</a:t>
@@ -4694,7 +4694,7 @@
             <a:r>
               <a:rPr sz="1800" b="1" i="0">
                 <a:solidFill>
-                  <a:srgbClr val="7A1F2E"/>
+                  <a:srgbClr val="721D2B"/>
                 </a:solidFill>
               </a:rPr>
               <a:t>오늘의 우리</a:t>
@@ -4754,7 +4754,7 @@
     <p:bg>
       <p:bgPr>
         <a:solidFill>
-          <a:srgbClr val="FBEFF1"/>
+          <a:srgbClr val="FCF3F4"/>
         </a:solidFill>
         <a:effectLst/>
       </p:bgPr>
@@ -4783,7 +4783,7 @@
           <a:noFill/>
           <a:ln w="28575">
             <a:solidFill>
-              <a:srgbClr val="CC334D"/>
+              <a:srgbClr val="DF3A55"/>
             </a:solidFill>
           </a:ln>
         </p:spPr>
@@ -4812,7 +4812,7 @@
           <a:noFill/>
           <a:ln w="9525">
             <a:solidFill>
-              <a:srgbClr val="F4CDD3"/>
+              <a:srgbClr val="F7D4DA"/>
             </a:solidFill>
           </a:ln>
         </p:spPr>
@@ -4854,7 +4854,7 @@
             <a:r>
               <a:rPr sz="3000" b="1" i="0">
                 <a:solidFill>
-                  <a:srgbClr val="7A1F2E"/>
+                  <a:srgbClr val="721D2B"/>
                 </a:solidFill>
               </a:rPr>
               <a:t>우리 가족의 약속</a:t>
@@ -4879,11 +4879,11 @@
             </a:avLst>
           </a:prstGeom>
           <a:solidFill>
-            <a:srgbClr val="FBEFF1"/>
+            <a:srgbClr val="FCF3F4"/>
           </a:solidFill>
           <a:ln w="12700">
             <a:solidFill>
-              <a:srgbClr val="F4CDD3"/>
+              <a:srgbClr val="F7D4DA"/>
             </a:solidFill>
           </a:ln>
         </p:spPr>
@@ -4910,7 +4910,7 @@
             <a:avLst/>
           </a:prstGeom>
           <a:solidFill>
-            <a:srgbClr val="CC334D"/>
+            <a:srgbClr val="DF3A55"/>
           </a:solidFill>
           <a:ln>
             <a:noFill/>
@@ -4968,7 +4968,7 @@
             <a:r>
               <a:rPr sz="1800" b="1" i="0">
                 <a:solidFill>
-                  <a:srgbClr val="7A1F2E"/>
+                  <a:srgbClr val="721D2B"/>
                 </a:solidFill>
               </a:rPr>
               <a:t>약속 1</a:t>
@@ -5031,11 +5031,11 @@
             </a:avLst>
           </a:prstGeom>
           <a:solidFill>
-            <a:srgbClr val="FBEFF1"/>
+            <a:srgbClr val="FCF3F4"/>
           </a:solidFill>
           <a:ln w="12700">
             <a:solidFill>
-              <a:srgbClr val="F4CDD3"/>
+              <a:srgbClr val="F7D4DA"/>
             </a:solidFill>
           </a:ln>
         </p:spPr>
@@ -5062,7 +5062,7 @@
             <a:avLst/>
           </a:prstGeom>
           <a:solidFill>
-            <a:srgbClr val="CC334D"/>
+            <a:srgbClr val="DF3A55"/>
           </a:solidFill>
           <a:ln>
             <a:noFill/>
@@ -5120,7 +5120,7 @@
             <a:r>
               <a:rPr sz="1800" b="1" i="0">
                 <a:solidFill>
-                  <a:srgbClr val="7A1F2E"/>
+                  <a:srgbClr val="721D2B"/>
                 </a:solidFill>
               </a:rPr>
               <a:t>약속 2</a:t>
@@ -5183,11 +5183,11 @@
             </a:avLst>
           </a:prstGeom>
           <a:solidFill>
-            <a:srgbClr val="FBEFF1"/>
+            <a:srgbClr val="FCF3F4"/>
           </a:solidFill>
           <a:ln w="12700">
             <a:solidFill>
-              <a:srgbClr val="F4CDD3"/>
+              <a:srgbClr val="F7D4DA"/>
             </a:solidFill>
           </a:ln>
         </p:spPr>
@@ -5214,7 +5214,7 @@
             <a:avLst/>
           </a:prstGeom>
           <a:solidFill>
-            <a:srgbClr val="CC334D"/>
+            <a:srgbClr val="DF3A55"/>
           </a:solidFill>
           <a:ln>
             <a:noFill/>
@@ -5272,7 +5272,7 @@
             <a:r>
               <a:rPr sz="1800" b="1" i="0">
                 <a:solidFill>
-                  <a:srgbClr val="7A1F2E"/>
+                  <a:srgbClr val="721D2B"/>
                 </a:solidFill>
               </a:rPr>
               <a:t>약속 3</a:t>
@@ -5332,7 +5332,7 @@
     <p:bg>
       <p:bgPr>
         <a:solidFill>
-          <a:srgbClr val="FBEFF1"/>
+          <a:srgbClr val="FCF3F4"/>
         </a:solidFill>
         <a:effectLst/>
       </p:bgPr>
@@ -5361,7 +5361,7 @@
           <a:noFill/>
           <a:ln w="28575">
             <a:solidFill>
-              <a:srgbClr val="CC334D"/>
+              <a:srgbClr val="DF3A55"/>
             </a:solidFill>
           </a:ln>
         </p:spPr>
@@ -5390,7 +5390,7 @@
           <a:noFill/>
           <a:ln w="9525">
             <a:solidFill>
-              <a:srgbClr val="F4CDD3"/>
+              <a:srgbClr val="F7D4DA"/>
             </a:solidFill>
           </a:ln>
         </p:spPr>
@@ -5432,7 +5432,7 @@
             <a:r>
               <a:rPr sz="3000" b="1" i="0">
                 <a:solidFill>
-                  <a:srgbClr val="7A1F2E"/>
+                  <a:srgbClr val="721D2B"/>
                 </a:solidFill>
               </a:rPr>
               <a:t>가족 사진</a:t>
@@ -5457,11 +5457,11 @@
             </a:avLst>
           </a:prstGeom>
           <a:solidFill>
-            <a:srgbClr val="F4CDD3"/>
+            <a:srgbClr val="F7D4DA"/>
           </a:solidFill>
           <a:ln w="19050">
             <a:solidFill>
-              <a:srgbClr val="CC334D"/>
+              <a:srgbClr val="DF3A55"/>
             </a:solidFill>
             <a:prstDash val="dash"/>
           </a:ln>
@@ -5480,7 +5480,7 @@
             <a:r>
               <a:rPr sz="1200" b="0" i="0">
                 <a:solidFill>
-                  <a:srgbClr val="7A1F2E"/>
+                  <a:srgbClr val="721D2B"/>
                 </a:solidFill>
               </a:rPr>
               <a:t>사진 1</a:t>
@@ -5505,11 +5505,11 @@
             </a:avLst>
           </a:prstGeom>
           <a:solidFill>
-            <a:srgbClr val="F4CDD3"/>
+            <a:srgbClr val="F7D4DA"/>
           </a:solidFill>
           <a:ln w="19050">
             <a:solidFill>
-              <a:srgbClr val="CC334D"/>
+              <a:srgbClr val="DF3A55"/>
             </a:solidFill>
             <a:prstDash val="dash"/>
           </a:ln>
@@ -5528,7 +5528,7 @@
             <a:r>
               <a:rPr sz="1200" b="0" i="0">
                 <a:solidFill>
-                  <a:srgbClr val="7A1F2E"/>
+                  <a:srgbClr val="721D2B"/>
                 </a:solidFill>
               </a:rPr>
               <a:t>사진 2</a:t>
@@ -5553,11 +5553,11 @@
             </a:avLst>
           </a:prstGeom>
           <a:solidFill>
-            <a:srgbClr val="F4CDD3"/>
+            <a:srgbClr val="F7D4DA"/>
           </a:solidFill>
           <a:ln w="19050">
             <a:solidFill>
-              <a:srgbClr val="CC334D"/>
+              <a:srgbClr val="DF3A55"/>
             </a:solidFill>
             <a:prstDash val="dash"/>
           </a:ln>
@@ -5576,7 +5576,7 @@
             <a:r>
               <a:rPr sz="1200" b="0" i="0">
                 <a:solidFill>
-                  <a:srgbClr val="7A1F2E"/>
+                  <a:srgbClr val="721D2B"/>
                 </a:solidFill>
               </a:rPr>
               <a:t>사진 3</a:t>
@@ -5601,11 +5601,11 @@
             </a:avLst>
           </a:prstGeom>
           <a:solidFill>
-            <a:srgbClr val="F4CDD3"/>
+            <a:srgbClr val="F7D4DA"/>
           </a:solidFill>
           <a:ln w="19050">
             <a:solidFill>
-              <a:srgbClr val="CC334D"/>
+              <a:srgbClr val="DF3A55"/>
             </a:solidFill>
             <a:prstDash val="dash"/>
           </a:ln>
@@ -5624,7 +5624,7 @@
             <a:r>
               <a:rPr sz="1200" b="0" i="0">
                 <a:solidFill>
-                  <a:srgbClr val="7A1F2E"/>
+                  <a:srgbClr val="721D2B"/>
                 </a:solidFill>
               </a:rPr>
               <a:t>사진 4</a:t>
@@ -5649,11 +5649,11 @@
             </a:avLst>
           </a:prstGeom>
           <a:solidFill>
-            <a:srgbClr val="F4CDD3"/>
+            <a:srgbClr val="F7D4DA"/>
           </a:solidFill>
           <a:ln w="19050">
             <a:solidFill>
-              <a:srgbClr val="CC334D"/>
+              <a:srgbClr val="DF3A55"/>
             </a:solidFill>
             <a:prstDash val="dash"/>
           </a:ln>
@@ -5672,7 +5672,7 @@
             <a:r>
               <a:rPr sz="1200" b="0" i="0">
                 <a:solidFill>
-                  <a:srgbClr val="7A1F2E"/>
+                  <a:srgbClr val="721D2B"/>
                 </a:solidFill>
               </a:rPr>
               <a:t>사진 5</a:t>
@@ -5697,11 +5697,11 @@
             </a:avLst>
           </a:prstGeom>
           <a:solidFill>
-            <a:srgbClr val="F4CDD3"/>
+            <a:srgbClr val="F7D4DA"/>
           </a:solidFill>
           <a:ln w="19050">
             <a:solidFill>
-              <a:srgbClr val="CC334D"/>
+              <a:srgbClr val="DF3A55"/>
             </a:solidFill>
             <a:prstDash val="dash"/>
           </a:ln>
@@ -5720,7 +5720,7 @@
             <a:r>
               <a:rPr sz="1200" b="0" i="0">
                 <a:solidFill>
-                  <a:srgbClr val="7A1F2E"/>
+                  <a:srgbClr val="721D2B"/>
                 </a:solidFill>
               </a:rPr>
               <a:t>사진 6</a:t>
@@ -5800,7 +5800,7 @@
             <a:r>
               <a:rPr sz="3600" b="1" i="0">
                 <a:solidFill>
-                  <a:srgbClr val="7A1F2E"/>
+                  <a:srgbClr val="721D2B"/>
                 </a:solidFill>
               </a:rPr>
               <a:t>우리 가족 소개를 마칩니다</a:t>
@@ -5838,7 +5838,7 @@
             <a:r>
               <a:rPr sz="1700" b="0" i="1">
                 <a:solidFill>
-                  <a:srgbClr val="7A1F2E"/>
+                  <a:srgbClr val="721D2B"/>
                 </a:solidFill>
               </a:rPr>
               <a:t>읽어 주셔서 고맙습니다</a:t>
@@ -5903,34 +5903,34 @@
         <a:sysClr val="window" lastClr="FFFFFF"/>
       </a:lt1>
       <a:dk2>
-        <a:srgbClr val="7A1F2E"/>
+        <a:srgbClr val="721D2B"/>
       </a:dk2>
       <a:lt2>
-        <a:srgbClr val="FBEFF1"/>
+        <a:srgbClr val="FCF3F4"/>
       </a:lt2>
       <a:accent1>
-        <a:srgbClr val="CC334D"/>
+        <a:srgbClr val="DF3A55"/>
       </a:accent1>
       <a:accent2>
-        <a:srgbClr val="3B9158"/>
+        <a:srgbClr val="339941"/>
       </a:accent2>
       <a:accent3>
-        <a:srgbClr val="7A1F2E"/>
+        <a:srgbClr val="721D2B"/>
       </a:accent3>
       <a:accent4>
-        <a:srgbClr val="F4CDD3"/>
+        <a:srgbClr val="F7D4DA"/>
       </a:accent4>
       <a:accent5>
-        <a:srgbClr val="846252"/>
+        <a:srgbClr val="896A4B"/>
       </a:accent5>
       <a:accent6>
-        <a:srgbClr val="AF7982"/>
+        <a:srgbClr val="AA7780"/>
       </a:accent6>
       <a:hlink>
-        <a:srgbClr val="CC334D"/>
+        <a:srgbClr val="DF3A55"/>
       </a:hlink>
       <a:folHlink>
-        <a:srgbClr val="7A1F2E"/>
+        <a:srgbClr val="721D2B"/>
       </a:folHlink>
     </a:clrScheme>
     <a:fontScheme name="Office">

--- a/public/fun/pack/pptx/family/가족소개_10_반려동물과함께_어버이날꽃.pptx
+++ b/public/fun/pack/pptx/family/가족소개_10_반려동물과함께_어버이날꽃.pptx
@@ -3286,6 +3286,14 @@
 <file path=ppt/slides/slide1.xml><?xml version="1.0" encoding="utf-8"?>
 <p:sld xmlns:a="http://schemas.openxmlformats.org/drawingml/2006/main" xmlns:p="http://schemas.openxmlformats.org/presentationml/2006/main" xmlns:r="http://schemas.openxmlformats.org/officeDocument/2006/relationships">
   <p:cSld>
+    <p:bg>
+      <p:bgPr>
+        <a:solidFill>
+          <a:srgbClr val="FDEAED"/>
+        </a:solidFill>
+        <a:effectLst/>
+      </p:bgPr>
+    </p:bg>
     <p:spTree>
       <p:nvGrpSpPr>
         <p:cNvPr id="1" name=""/>
@@ -3293,30 +3301,120 @@
         <p:nvPr/>
       </p:nvGrpSpPr>
       <p:grpSpPr/>
-      <p:pic>
-        <p:nvPicPr>
-          <p:cNvPr id="3" name="표지 그림" descr="family-10.jpg"/>
-          <p:cNvPicPr>
-            <a:picLocks noChangeAspect="1"/>
-          </p:cNvPicPr>
+      <p:sp>
+        <p:nvSpPr>
+          <p:cNvPr id="3" name="사진 자리"/>
+          <p:cNvSpPr/>
           <p:nvPr/>
-        </p:nvPicPr>
-        <p:blipFill>
-          <a:blip r:embed="rId2"/>
-          <a:stretch>
-            <a:fillRect/>
-          </a:stretch>
-        </p:blipFill>
-        <p:spPr>
-          <a:xfrm>
-            <a:off x="0" y="0"/>
-            <a:ext cx="12191695" cy="6858000"/>
+        </p:nvSpPr>
+        <p:spPr>
+          <a:xfrm>
+            <a:off x="1463003" y="960120"/>
+            <a:ext cx="3657508" cy="4526280"/>
+          </a:xfrm>
+          <a:prstGeom prst="roundRect">
+            <a:avLst>
+              <a:gd name="adj" fmla="val 4000"/>
+            </a:avLst>
+          </a:prstGeom>
+          <a:solidFill>
+            <a:srgbClr val="F2A6B3"/>
+          </a:solidFill>
+          <a:ln>
+            <a:noFill/>
+          </a:ln>
+        </p:spPr>
+        <p:txBody>
+          <a:bodyPr rtlCol="0" anchor="ctr" wrap="square" lIns="54864" rIns="54864" tIns="27432" bIns="27432">
+            <a:noAutofit/>
+          </a:bodyPr>
+          <a:lstStyle/>
+          <a:p>
+            <a:pPr algn="ctr">
+              <a:lnSpc>
+                <a:spcPct val="100000"/>
+              </a:lnSpc>
+            </a:pPr>
+            <a:r>
+              <a:rPr sz="1400" b="0" i="0">
+                <a:solidFill>
+                  <a:srgbClr val="49272D"/>
+                </a:solidFill>
+              </a:rPr>
+              <a:t>사진을 넣어 주세요</a:t>
+            </a:r>
+          </a:p>
+        </p:txBody>
+      </p:sp>
+      <p:sp>
+        <p:nvSpPr>
+          <p:cNvPr id="4" name="장식"/>
+          <p:cNvSpPr/>
+          <p:nvPr/>
+        </p:nvSpPr>
+        <p:spPr>
+          <a:xfrm>
+            <a:off x="975335" y="1234439"/>
+            <a:ext cx="3657508" cy="4526280"/>
+          </a:xfrm>
+          <a:prstGeom prst="roundRect">
+            <a:avLst>
+              <a:gd name="adj" fmla="val 4000"/>
+            </a:avLst>
+          </a:prstGeom>
+          <a:noFill/>
+          <a:ln w="9525">
+            <a:solidFill>
+              <a:srgbClr val="26231F"/>
+            </a:solidFill>
+          </a:ln>
+        </p:spPr>
+        <p:txBody>
+          <a:bodyPr rtlCol="0" anchor="ctr"/>
+          <a:lstStyle/>
+          <a:p>
+            <a:pPr algn="ctr"/>
+          </a:p>
+        </p:txBody>
+      </p:sp>
+      <p:sp>
+        <p:nvSpPr>
+          <p:cNvPr id="5" name="라벨"/>
+          <p:cNvSpPr txBox="1"/>
+          <p:nvPr/>
+        </p:nvSpPr>
+        <p:spPr>
+          <a:xfrm>
+            <a:off x="6827349" y="2148840"/>
+            <a:ext cx="4632844" cy="274320"/>
           </a:xfrm>
           <a:prstGeom prst="rect">
             <a:avLst/>
           </a:prstGeom>
-        </p:spPr>
-      </p:pic>
+          <a:noFill/>
+        </p:spPr>
+        <p:txBody>
+          <a:bodyPr wrap="square" lIns="54864" rIns="54864" tIns="27432" bIns="27432" anchor="t">
+            <a:noAutofit/>
+          </a:bodyPr>
+          <a:lstStyle/>
+          <a:p>
+            <a:pPr algn="l">
+              <a:lnSpc>
+                <a:spcPct val="115000"/>
+              </a:lnSpc>
+            </a:pPr>
+            <a:r>
+              <a:rPr sz="1000" b="1" i="0" spc="250">
+                <a:solidFill>
+                  <a:srgbClr val="26231F"/>
+                </a:solidFill>
+              </a:rPr>
+              <a:t>FAMILY ALBUM</a:t>
+            </a:r>
+          </a:p>
+        </p:txBody>
+      </p:sp>
       <p:sp>
         <p:nvSpPr>
           <p:cNvPr id="2" name="Title 1"/>
@@ -3329,8 +3427,8 @@
         </p:nvSpPr>
         <p:spPr>
           <a:xfrm>
-            <a:off x="853418" y="2057400"/>
-            <a:ext cx="6095847" cy="1554480"/>
+            <a:off x="6827349" y="2606040"/>
+            <a:ext cx="4632844" cy="1188720"/>
           </a:xfrm>
         </p:spPr>
         <p:txBody>
@@ -3345,9 +3443,9 @@
               </a:lnSpc>
             </a:pPr>
             <a:r>
-              <a:rPr sz="3600" b="1" i="0">
-                <a:solidFill>
-                  <a:srgbClr val="721D2B"/>
+              <a:rPr sz="4000" b="1" i="0">
+                <a:solidFill>
+                  <a:srgbClr val="26231F"/>
                 </a:solidFill>
               </a:rPr>
               <a:t>우리 가족을 소개합니다</a:t>
@@ -3357,14 +3455,14 @@
       </p:sp>
       <p:sp>
         <p:nvSpPr>
-          <p:cNvPr id="4" name="한 줄 문구"/>
+          <p:cNvPr id="6" name="한 줄 문구"/>
           <p:cNvSpPr txBox="1"/>
           <p:nvPr/>
         </p:nvSpPr>
         <p:spPr>
           <a:xfrm>
-            <a:off x="853418" y="3749039"/>
-            <a:ext cx="6095847" cy="822960"/>
+            <a:off x="6827349" y="3886200"/>
+            <a:ext cx="4632844" cy="822960"/>
           </a:xfrm>
           <a:prstGeom prst="rect">
             <a:avLst/>
@@ -3383,9 +3481,9 @@
               </a:lnSpc>
             </a:pPr>
             <a:r>
-              <a:rPr sz="1700" b="0" i="1">
-                <a:solidFill>
-                  <a:srgbClr val="721D2B"/>
+              <a:rPr sz="1700" b="0" i="0">
+                <a:solidFill>
+                  <a:srgbClr val="26231F"/>
                 </a:solidFill>
               </a:rPr>
               <a:t>어버이날 꽃 옆에서 한 장</a:t>
@@ -3395,14 +3493,14 @@
       </p:sp>
       <p:sp>
         <p:nvSpPr>
-          <p:cNvPr id="5" name="안내 문구"/>
+          <p:cNvPr id="7" name="안내 문구"/>
           <p:cNvSpPr txBox="1"/>
           <p:nvPr/>
         </p:nvSpPr>
         <p:spPr>
           <a:xfrm>
-            <a:off x="853418" y="4617720"/>
-            <a:ext cx="6095847" cy="914400"/>
+            <a:off x="6827349" y="4754880"/>
+            <a:ext cx="4632844" cy="914400"/>
           </a:xfrm>
           <a:prstGeom prst="rect">
             <a:avLst/>
@@ -3423,10 +3521,10 @@
             <a:r>
               <a:rPr sz="1400" b="0" i="0">
                 <a:solidFill>
-                  <a:srgbClr val="666666"/>
+                  <a:srgbClr val="26231F"/>
                 </a:solidFill>
               </a:rPr>
-              <a:t>반려동물과 함께 · 2027. 00. 00</a:t>
+              <a:t>반려동물과 함께 · 날짜 입력</a:t>
             </a:r>
           </a:p>
         </p:txBody>
@@ -3445,7 +3543,7 @@
     <p:bg>
       <p:bgPr>
         <a:solidFill>
-          <a:srgbClr val="FCF3F4"/>
+          <a:srgbClr val="FFFFFF"/>
         </a:solidFill>
         <a:effectLst/>
       </p:bgPr>
@@ -3465,46 +3563,86 @@
         </p:nvSpPr>
         <p:spPr>
           <a:xfrm>
-            <a:off x="256032" y="256032"/>
-            <a:ext cx="11679631" cy="6345936"/>
+            <a:off x="640080" y="566928"/>
+            <a:ext cx="64008" cy="868680"/>
+          </a:xfrm>
+          <a:prstGeom prst="roundRect">
+            <a:avLst>
+              <a:gd name="adj" fmla="val 50000"/>
+            </a:avLst>
+          </a:prstGeom>
+          <a:solidFill>
+            <a:srgbClr val="ED97A5"/>
+          </a:solidFill>
+          <a:ln>
+            <a:noFill/>
+          </a:ln>
+        </p:spPr>
+        <p:txBody>
+          <a:bodyPr rtlCol="0" anchor="ctr"/>
+          <a:lstStyle/>
+          <a:p>
+            <a:pPr algn="ctr"/>
+          </a:p>
+        </p:txBody>
+      </p:sp>
+      <p:sp>
+        <p:nvSpPr>
+          <p:cNvPr id="4" name="상단 라벨"/>
+          <p:cNvSpPr txBox="1"/>
+          <p:nvPr/>
+        </p:nvSpPr>
+        <p:spPr>
+          <a:xfrm>
+            <a:off x="868680" y="274320"/>
+            <a:ext cx="5486400" cy="274320"/>
           </a:xfrm>
           <a:prstGeom prst="rect">
             <a:avLst/>
           </a:prstGeom>
           <a:noFill/>
-          <a:ln w="28575">
-            <a:solidFill>
-              <a:srgbClr val="DF3A55"/>
-            </a:solidFill>
-          </a:ln>
-        </p:spPr>
-        <p:txBody>
-          <a:bodyPr rtlCol="0" anchor="ctr"/>
-          <a:lstStyle/>
-          <a:p>
-            <a:pPr algn="ctr"/>
-          </a:p>
-        </p:txBody>
-      </p:sp>
-      <p:sp>
-        <p:nvSpPr>
-          <p:cNvPr id="4" name="장식"/>
+        </p:spPr>
+        <p:txBody>
+          <a:bodyPr wrap="square" lIns="54864" rIns="54864" tIns="27432" bIns="27432" anchor="ctr">
+            <a:noAutofit/>
+          </a:bodyPr>
+          <a:lstStyle/>
+          <a:p>
+            <a:pPr algn="l">
+              <a:lnSpc>
+                <a:spcPct val="115000"/>
+              </a:lnSpc>
+            </a:pPr>
+            <a:r>
+              <a:rPr sz="900" b="1" i="0" spc="250">
+                <a:solidFill>
+                  <a:srgbClr val="8E8780"/>
+                </a:solidFill>
+              </a:rPr>
+              <a:t>FAMILY ALBUM</a:t>
+            </a:r>
+          </a:p>
+        </p:txBody>
+      </p:sp>
+      <p:sp>
+        <p:nvSpPr>
+          <p:cNvPr id="5" name="포인트"/>
           <p:cNvSpPr/>
           <p:nvPr/>
         </p:nvSpPr>
         <p:spPr>
           <a:xfrm>
-            <a:off x="384048" y="384048"/>
-            <a:ext cx="11423599" cy="6089904"/>
-          </a:xfrm>
-          <a:prstGeom prst="rect">
+            <a:off x="11167567" y="667512"/>
+            <a:ext cx="310896" cy="310896"/>
+          </a:xfrm>
+          <a:prstGeom prst="star4">
             <a:avLst/>
           </a:prstGeom>
-          <a:noFill/>
-          <a:ln w="9525">
-            <a:solidFill>
-              <a:srgbClr val="F7D4DA"/>
-            </a:solidFill>
+          <a:solidFill>
+            <a:srgbClr val="F2A6B3"/>
+          </a:solidFill>
+          <a:ln>
+            <a:noFill/>
           </a:ln>
         </p:spPr>
         <p:txBody>
@@ -3527,8 +3665,8 @@
         </p:nvSpPr>
         <p:spPr>
           <a:xfrm>
-            <a:off x="822960" y="548640"/>
-            <a:ext cx="9265615" cy="822960"/>
+            <a:off x="868680" y="566928"/>
+            <a:ext cx="9448495" cy="868680"/>
           </a:xfrm>
         </p:spPr>
         <p:txBody>
@@ -3545,7 +3683,7 @@
             <a:r>
               <a:rPr sz="3000" b="1" i="0">
                 <a:solidFill>
-                  <a:srgbClr val="721D2B"/>
+                  <a:srgbClr val="26231F"/>
                 </a:solidFill>
               </a:rPr>
               <a:t>가족 구성원</a:t>
@@ -3555,25 +3693,23 @@
       </p:sp>
       <p:sp>
         <p:nvSpPr>
-          <p:cNvPr id="5" name="사진 자리"/>
+          <p:cNvPr id="6" name="사진 자리"/>
           <p:cNvSpPr/>
           <p:nvPr/>
         </p:nvSpPr>
         <p:spPr>
           <a:xfrm>
-            <a:off x="1349959" y="1554480"/>
-            <a:ext cx="2308860" cy="2308860"/>
+            <a:off x="1239469" y="1783080"/>
+            <a:ext cx="2286000" cy="2286000"/>
           </a:xfrm>
           <a:prstGeom prst="ellipse">
             <a:avLst/>
           </a:prstGeom>
           <a:solidFill>
-            <a:srgbClr val="F7D4DA"/>
+            <a:srgbClr val="FAD1D8"/>
           </a:solidFill>
           <a:ln w="19050">
-            <a:solidFill>
-              <a:srgbClr val="DF3A55"/>
-            </a:solidFill>
+            <a:noFill/>
             <a:prstDash val="dash"/>
           </a:ln>
         </p:spPr>
@@ -3591,7 +3727,7 @@
             <a:r>
               <a:rPr sz="1200" b="0" i="0">
                 <a:solidFill>
-                  <a:srgbClr val="721D2B"/>
+                  <a:srgbClr val="8E8780"/>
                 </a:solidFill>
               </a:rPr>
               <a:t>사진</a:t>
@@ -3601,14 +3737,14 @@
       </p:sp>
       <p:sp>
         <p:nvSpPr>
-          <p:cNvPr id="6" name="TextBox 5"/>
+          <p:cNvPr id="7" name="TextBox 6"/>
           <p:cNvSpPr txBox="1"/>
           <p:nvPr/>
         </p:nvSpPr>
         <p:spPr>
           <a:xfrm>
-            <a:off x="822960" y="3954779"/>
-            <a:ext cx="3362858" cy="411480"/>
+            <a:off x="640080" y="4160520"/>
+            <a:ext cx="3484778" cy="411480"/>
           </a:xfrm>
           <a:prstGeom prst="rect">
             <a:avLst/>
@@ -3629,7 +3765,7 @@
             <a:r>
               <a:rPr sz="1600" b="1" i="0">
                 <a:solidFill>
-                  <a:srgbClr val="721D2B"/>
+                  <a:srgbClr val="49272D"/>
                 </a:solidFill>
               </a:rPr>
               <a:t>보호자 1</a:t>
@@ -3639,14 +3775,14 @@
       </p:sp>
       <p:sp>
         <p:nvSpPr>
-          <p:cNvPr id="7" name="TextBox 6"/>
+          <p:cNvPr id="8" name="TextBox 7"/>
           <p:cNvSpPr txBox="1"/>
           <p:nvPr/>
         </p:nvSpPr>
         <p:spPr>
           <a:xfrm>
-            <a:off x="914400" y="4411979"/>
-            <a:ext cx="3179978" cy="1760219"/>
+            <a:off x="731519" y="4617720"/>
+            <a:ext cx="3301898" cy="1737360"/>
           </a:xfrm>
           <a:prstGeom prst="rect">
             <a:avLst/>
@@ -3707,25 +3843,23 @@
       </p:sp>
       <p:sp>
         <p:nvSpPr>
-          <p:cNvPr id="8" name="사진 자리"/>
+          <p:cNvPr id="9" name="사진 자리"/>
           <p:cNvSpPr/>
           <p:nvPr/>
         </p:nvSpPr>
         <p:spPr>
           <a:xfrm>
-            <a:off x="4941417" y="1554480"/>
-            <a:ext cx="2308860" cy="2308860"/>
+            <a:off x="4952847" y="1783080"/>
+            <a:ext cx="2286000" cy="2286000"/>
           </a:xfrm>
           <a:prstGeom prst="ellipse">
             <a:avLst/>
           </a:prstGeom>
           <a:solidFill>
-            <a:srgbClr val="F7D4DA"/>
+            <a:srgbClr val="FAD1D8"/>
           </a:solidFill>
           <a:ln w="19050">
-            <a:solidFill>
-              <a:srgbClr val="DF3A55"/>
-            </a:solidFill>
+            <a:noFill/>
             <a:prstDash val="dash"/>
           </a:ln>
         </p:spPr>
@@ -3743,7 +3877,7 @@
             <a:r>
               <a:rPr sz="1200" b="0" i="0">
                 <a:solidFill>
-                  <a:srgbClr val="721D2B"/>
+                  <a:srgbClr val="8E8780"/>
                 </a:solidFill>
               </a:rPr>
               <a:t>사진</a:t>
@@ -3753,14 +3887,14 @@
       </p:sp>
       <p:sp>
         <p:nvSpPr>
-          <p:cNvPr id="9" name="TextBox 8"/>
+          <p:cNvPr id="10" name="TextBox 9"/>
           <p:cNvSpPr txBox="1"/>
           <p:nvPr/>
         </p:nvSpPr>
         <p:spPr>
           <a:xfrm>
-            <a:off x="4414418" y="3954779"/>
-            <a:ext cx="3362858" cy="411480"/>
+            <a:off x="4353458" y="4160520"/>
+            <a:ext cx="3484778" cy="411480"/>
           </a:xfrm>
           <a:prstGeom prst="rect">
             <a:avLst/>
@@ -3781,7 +3915,7 @@
             <a:r>
               <a:rPr sz="1600" b="1" i="0">
                 <a:solidFill>
-                  <a:srgbClr val="721D2B"/>
+                  <a:srgbClr val="49272D"/>
                 </a:solidFill>
               </a:rPr>
               <a:t>보호자 2</a:t>
@@ -3791,14 +3925,14 @@
       </p:sp>
       <p:sp>
         <p:nvSpPr>
-          <p:cNvPr id="10" name="TextBox 9"/>
+          <p:cNvPr id="11" name="TextBox 10"/>
           <p:cNvSpPr txBox="1"/>
           <p:nvPr/>
         </p:nvSpPr>
         <p:spPr>
           <a:xfrm>
-            <a:off x="4505858" y="4411979"/>
-            <a:ext cx="3179978" cy="1760219"/>
+            <a:off x="4444898" y="4617720"/>
+            <a:ext cx="3301898" cy="1737360"/>
           </a:xfrm>
           <a:prstGeom prst="rect">
             <a:avLst/>
@@ -3859,25 +3993,23 @@
       </p:sp>
       <p:sp>
         <p:nvSpPr>
-          <p:cNvPr id="11" name="사진 자리"/>
+          <p:cNvPr id="12" name="사진 자리"/>
           <p:cNvSpPr/>
           <p:nvPr/>
         </p:nvSpPr>
         <p:spPr>
           <a:xfrm>
-            <a:off x="8532876" y="1554480"/>
-            <a:ext cx="2308860" cy="2308860"/>
+            <a:off x="8666226" y="1783080"/>
+            <a:ext cx="2286000" cy="2286000"/>
           </a:xfrm>
           <a:prstGeom prst="ellipse">
             <a:avLst/>
           </a:prstGeom>
           <a:solidFill>
-            <a:srgbClr val="F7D4DA"/>
+            <a:srgbClr val="FAD1D8"/>
           </a:solidFill>
           <a:ln w="19050">
-            <a:solidFill>
-              <a:srgbClr val="DF3A55"/>
-            </a:solidFill>
+            <a:noFill/>
             <a:prstDash val="dash"/>
           </a:ln>
         </p:spPr>
@@ -3895,7 +4027,7 @@
             <a:r>
               <a:rPr sz="1200" b="0" i="0">
                 <a:solidFill>
-                  <a:srgbClr val="721D2B"/>
+                  <a:srgbClr val="8E8780"/>
                 </a:solidFill>
               </a:rPr>
               <a:t>사진</a:t>
@@ -3905,14 +4037,14 @@
       </p:sp>
       <p:sp>
         <p:nvSpPr>
-          <p:cNvPr id="12" name="TextBox 11"/>
+          <p:cNvPr id="13" name="TextBox 12"/>
           <p:cNvSpPr txBox="1"/>
           <p:nvPr/>
         </p:nvSpPr>
         <p:spPr>
           <a:xfrm>
-            <a:off x="8005876" y="3954779"/>
-            <a:ext cx="3362858" cy="411480"/>
+            <a:off x="8066836" y="4160520"/>
+            <a:ext cx="3484778" cy="411480"/>
           </a:xfrm>
           <a:prstGeom prst="rect">
             <a:avLst/>
@@ -3933,7 +4065,7 @@
             <a:r>
               <a:rPr sz="1600" b="1" i="0">
                 <a:solidFill>
-                  <a:srgbClr val="721D2B"/>
+                  <a:srgbClr val="49272D"/>
                 </a:solidFill>
               </a:rPr>
               <a:t>우리 반려동물</a:t>
@@ -3943,14 +4075,14 @@
       </p:sp>
       <p:sp>
         <p:nvSpPr>
-          <p:cNvPr id="13" name="TextBox 12"/>
+          <p:cNvPr id="14" name="TextBox 13"/>
           <p:cNvSpPr txBox="1"/>
           <p:nvPr/>
         </p:nvSpPr>
         <p:spPr>
           <a:xfrm>
-            <a:off x="8097316" y="4411979"/>
-            <a:ext cx="3179978" cy="1760219"/>
+            <a:off x="8158276" y="4617720"/>
+            <a:ext cx="3301898" cy="1737360"/>
           </a:xfrm>
           <a:prstGeom prst="rect">
             <a:avLst/>
@@ -4023,7 +4155,7 @@
     <p:bg>
       <p:bgPr>
         <a:solidFill>
-          <a:srgbClr val="FCF3F4"/>
+          <a:srgbClr val="FFFFFF"/>
         </a:solidFill>
         <a:effectLst/>
       </p:bgPr>
@@ -4043,46 +4175,86 @@
         </p:nvSpPr>
         <p:spPr>
           <a:xfrm>
-            <a:off x="256032" y="256032"/>
-            <a:ext cx="11679631" cy="6345936"/>
+            <a:off x="640080" y="566928"/>
+            <a:ext cx="64008" cy="868680"/>
+          </a:xfrm>
+          <a:prstGeom prst="roundRect">
+            <a:avLst>
+              <a:gd name="adj" fmla="val 50000"/>
+            </a:avLst>
+          </a:prstGeom>
+          <a:solidFill>
+            <a:srgbClr val="ED97A5"/>
+          </a:solidFill>
+          <a:ln>
+            <a:noFill/>
+          </a:ln>
+        </p:spPr>
+        <p:txBody>
+          <a:bodyPr rtlCol="0" anchor="ctr"/>
+          <a:lstStyle/>
+          <a:p>
+            <a:pPr algn="ctr"/>
+          </a:p>
+        </p:txBody>
+      </p:sp>
+      <p:sp>
+        <p:nvSpPr>
+          <p:cNvPr id="4" name="상단 라벨"/>
+          <p:cNvSpPr txBox="1"/>
+          <p:nvPr/>
+        </p:nvSpPr>
+        <p:spPr>
+          <a:xfrm>
+            <a:off x="868680" y="274320"/>
+            <a:ext cx="5486400" cy="274320"/>
           </a:xfrm>
           <a:prstGeom prst="rect">
             <a:avLst/>
           </a:prstGeom>
           <a:noFill/>
-          <a:ln w="28575">
-            <a:solidFill>
-              <a:srgbClr val="DF3A55"/>
-            </a:solidFill>
-          </a:ln>
-        </p:spPr>
-        <p:txBody>
-          <a:bodyPr rtlCol="0" anchor="ctr"/>
-          <a:lstStyle/>
-          <a:p>
-            <a:pPr algn="ctr"/>
-          </a:p>
-        </p:txBody>
-      </p:sp>
-      <p:sp>
-        <p:nvSpPr>
-          <p:cNvPr id="4" name="장식"/>
+        </p:spPr>
+        <p:txBody>
+          <a:bodyPr wrap="square" lIns="54864" rIns="54864" tIns="27432" bIns="27432" anchor="ctr">
+            <a:noAutofit/>
+          </a:bodyPr>
+          <a:lstStyle/>
+          <a:p>
+            <a:pPr algn="l">
+              <a:lnSpc>
+                <a:spcPct val="115000"/>
+              </a:lnSpc>
+            </a:pPr>
+            <a:r>
+              <a:rPr sz="900" b="1" i="0" spc="250">
+                <a:solidFill>
+                  <a:srgbClr val="8E8780"/>
+                </a:solidFill>
+              </a:rPr>
+              <a:t>FAMILY ALBUM</a:t>
+            </a:r>
+          </a:p>
+        </p:txBody>
+      </p:sp>
+      <p:sp>
+        <p:nvSpPr>
+          <p:cNvPr id="5" name="포인트"/>
           <p:cNvSpPr/>
           <p:nvPr/>
         </p:nvSpPr>
         <p:spPr>
           <a:xfrm>
-            <a:off x="384048" y="384048"/>
-            <a:ext cx="11423599" cy="6089904"/>
-          </a:xfrm>
-          <a:prstGeom prst="rect">
+            <a:off x="11167567" y="667512"/>
+            <a:ext cx="310896" cy="310896"/>
+          </a:xfrm>
+          <a:prstGeom prst="star4">
             <a:avLst/>
           </a:prstGeom>
-          <a:noFill/>
-          <a:ln w="9525">
-            <a:solidFill>
-              <a:srgbClr val="F7D4DA"/>
-            </a:solidFill>
+          <a:solidFill>
+            <a:srgbClr val="F2A6B3"/>
+          </a:solidFill>
+          <a:ln>
+            <a:noFill/>
           </a:ln>
         </p:spPr>
         <p:txBody>
@@ -4105,8 +4277,8 @@
         </p:nvSpPr>
         <p:spPr>
           <a:xfrm>
-            <a:off x="822960" y="548640"/>
-            <a:ext cx="9265615" cy="822960"/>
+            <a:off x="868680" y="566928"/>
+            <a:ext cx="9448495" cy="868680"/>
           </a:xfrm>
         </p:spPr>
         <p:txBody>
@@ -4123,7 +4295,7 @@
             <a:r>
               <a:rPr sz="3000" b="1" i="0">
                 <a:solidFill>
-                  <a:srgbClr val="721D2B"/>
+                  <a:srgbClr val="26231F"/>
                 </a:solidFill>
               </a:rPr>
               <a:t>우리 가족 이야기</a:t>
@@ -4133,20 +4305,20 @@
       </p:sp>
       <p:sp>
         <p:nvSpPr>
-          <p:cNvPr id="5" name="타임라인 선"/>
+          <p:cNvPr id="6" name="타임라인 선"/>
           <p:cNvSpPr/>
           <p:nvPr/>
         </p:nvSpPr>
         <p:spPr>
           <a:xfrm>
-            <a:off x="822960" y="3291840"/>
-            <a:ext cx="10545775" cy="54864"/>
+            <a:off x="640080" y="3520440"/>
+            <a:ext cx="10911535" cy="54864"/>
           </a:xfrm>
           <a:prstGeom prst="rect">
             <a:avLst/>
           </a:prstGeom>
           <a:solidFill>
-            <a:srgbClr val="F7D4DA"/>
+            <a:srgbClr val="FAD1D8"/>
           </a:solidFill>
           <a:ln>
             <a:noFill/>
@@ -4162,20 +4334,20 @@
       </p:sp>
       <p:sp>
         <p:nvSpPr>
-          <p:cNvPr id="6" name="때 1"/>
+          <p:cNvPr id="7" name="때 1"/>
           <p:cNvSpPr/>
           <p:nvPr/>
         </p:nvSpPr>
         <p:spPr>
           <a:xfrm>
-            <a:off x="1940013" y="3108960"/>
+            <a:off x="1802853" y="3337560"/>
             <a:ext cx="402336" cy="402336"/>
           </a:xfrm>
           <a:prstGeom prst="ellipse">
             <a:avLst/>
           </a:prstGeom>
           <a:solidFill>
-            <a:srgbClr val="DF3A55"/>
+            <a:srgbClr val="ED97A5"/>
           </a:solidFill>
           <a:ln w="38100">
             <a:solidFill>
@@ -4193,14 +4365,14 @@
       </p:sp>
       <p:sp>
         <p:nvSpPr>
-          <p:cNvPr id="7" name="TextBox 6"/>
+          <p:cNvPr id="8" name="TextBox 7"/>
           <p:cNvSpPr txBox="1"/>
           <p:nvPr/>
         </p:nvSpPr>
         <p:spPr>
           <a:xfrm>
-            <a:off x="868680" y="2468880"/>
-            <a:ext cx="2545003" cy="457200"/>
+            <a:off x="685800" y="2697480"/>
+            <a:ext cx="2636443" cy="457200"/>
           </a:xfrm>
           <a:prstGeom prst="rect">
             <a:avLst/>
@@ -4221,7 +4393,7 @@
             <a:r>
               <a:rPr sz="1600" b="1" i="0">
                 <a:solidFill>
-                  <a:srgbClr val="DF3A55"/>
+                  <a:srgbClr val="ED97A5"/>
                 </a:solidFill>
               </a:rPr>
               <a:t>처음 만난 날</a:t>
@@ -4231,14 +4403,14 @@
       </p:sp>
       <p:sp>
         <p:nvSpPr>
-          <p:cNvPr id="8" name="TextBox 7"/>
+          <p:cNvPr id="9" name="TextBox 8"/>
           <p:cNvSpPr txBox="1"/>
           <p:nvPr/>
         </p:nvSpPr>
         <p:spPr>
           <a:xfrm>
-            <a:off x="914400" y="3657600"/>
-            <a:ext cx="2453563" cy="457200"/>
+            <a:off x="731519" y="3886200"/>
+            <a:ext cx="2545003" cy="457200"/>
           </a:xfrm>
           <a:prstGeom prst="rect">
             <a:avLst/>
@@ -4259,7 +4431,7 @@
             <a:r>
               <a:rPr sz="1800" b="1" i="0">
                 <a:solidFill>
-                  <a:srgbClr val="721D2B"/>
+                  <a:srgbClr val="49272D"/>
                 </a:solidFill>
               </a:rPr>
               <a:t>우리의 인연</a:t>
@@ -4269,14 +4441,14 @@
       </p:sp>
       <p:sp>
         <p:nvSpPr>
-          <p:cNvPr id="9" name="TextBox 8"/>
+          <p:cNvPr id="10" name="TextBox 9"/>
           <p:cNvSpPr txBox="1"/>
           <p:nvPr/>
         </p:nvSpPr>
         <p:spPr>
           <a:xfrm>
-            <a:off x="914400" y="4160520"/>
-            <a:ext cx="2453563" cy="1645920"/>
+            <a:off x="731519" y="4389120"/>
+            <a:ext cx="2545003" cy="1645920"/>
           </a:xfrm>
           <a:prstGeom prst="rect">
             <a:avLst/>
@@ -4297,7 +4469,7 @@
             <a:r>
               <a:rPr sz="1500" b="0" i="0">
                 <a:solidFill>
-                  <a:srgbClr val="2B2B2B"/>
+                  <a:srgbClr val="26231F"/>
                 </a:solidFill>
               </a:rPr>
               <a:t>입양하던 날의 이야기</a:t>
@@ -4307,20 +4479,20 @@
       </p:sp>
       <p:sp>
         <p:nvSpPr>
-          <p:cNvPr id="10" name="때 2"/>
+          <p:cNvPr id="11" name="때 2"/>
           <p:cNvSpPr/>
           <p:nvPr/>
         </p:nvSpPr>
         <p:spPr>
           <a:xfrm>
-            <a:off x="4576457" y="3108960"/>
+            <a:off x="4530737" y="3337560"/>
             <a:ext cx="402336" cy="402336"/>
           </a:xfrm>
           <a:prstGeom prst="ellipse">
             <a:avLst/>
           </a:prstGeom>
           <a:solidFill>
-            <a:srgbClr val="DF3A55"/>
+            <a:srgbClr val="ED97A5"/>
           </a:solidFill>
           <a:ln w="38100">
             <a:solidFill>
@@ -4338,14 +4510,14 @@
       </p:sp>
       <p:sp>
         <p:nvSpPr>
-          <p:cNvPr id="11" name="TextBox 10"/>
+          <p:cNvPr id="12" name="TextBox 11"/>
           <p:cNvSpPr txBox="1"/>
           <p:nvPr/>
         </p:nvSpPr>
         <p:spPr>
           <a:xfrm>
-            <a:off x="3505123" y="2468880"/>
-            <a:ext cx="2545003" cy="457200"/>
+            <a:off x="3413683" y="2697480"/>
+            <a:ext cx="2636443" cy="457200"/>
           </a:xfrm>
           <a:prstGeom prst="rect">
             <a:avLst/>
@@ -4366,7 +4538,7 @@
             <a:r>
               <a:rPr sz="1600" b="1" i="0">
                 <a:solidFill>
-                  <a:srgbClr val="DF3A55"/>
+                  <a:srgbClr val="ED97A5"/>
                 </a:solidFill>
               </a:rPr>
               <a:t>첫 산책</a:t>
@@ -4376,14 +4548,14 @@
       </p:sp>
       <p:sp>
         <p:nvSpPr>
-          <p:cNvPr id="12" name="TextBox 11"/>
+          <p:cNvPr id="13" name="TextBox 12"/>
           <p:cNvSpPr txBox="1"/>
           <p:nvPr/>
         </p:nvSpPr>
         <p:spPr>
           <a:xfrm>
-            <a:off x="3550843" y="3657600"/>
-            <a:ext cx="2453563" cy="457200"/>
+            <a:off x="3459403" y="3886200"/>
+            <a:ext cx="2545003" cy="457200"/>
           </a:xfrm>
           <a:prstGeom prst="rect">
             <a:avLst/>
@@ -4404,7 +4576,7 @@
             <a:r>
               <a:rPr sz="1800" b="1" i="0">
                 <a:solidFill>
-                  <a:srgbClr val="721D2B"/>
+                  <a:srgbClr val="49272D"/>
                 </a:solidFill>
               </a:rPr>
               <a:t>함께한 첫 걸음</a:t>
@@ -4414,14 +4586,14 @@
       </p:sp>
       <p:sp>
         <p:nvSpPr>
-          <p:cNvPr id="13" name="TextBox 12"/>
+          <p:cNvPr id="14" name="TextBox 13"/>
           <p:cNvSpPr txBox="1"/>
           <p:nvPr/>
         </p:nvSpPr>
         <p:spPr>
           <a:xfrm>
-            <a:off x="3550843" y="4160520"/>
-            <a:ext cx="2453563" cy="1645920"/>
+            <a:off x="3459403" y="4389120"/>
+            <a:ext cx="2545003" cy="1645920"/>
           </a:xfrm>
           <a:prstGeom prst="rect">
             <a:avLst/>
@@ -4442,7 +4614,7 @@
             <a:r>
               <a:rPr sz="1500" b="0" i="0">
                 <a:solidFill>
-                  <a:srgbClr val="2B2B2B"/>
+                  <a:srgbClr val="26231F"/>
                 </a:solidFill>
               </a:rPr>
               <a:t>그날의 기억을 적어요</a:t>
@@ -4452,20 +4624,20 @@
       </p:sp>
       <p:sp>
         <p:nvSpPr>
-          <p:cNvPr id="14" name="때 3"/>
+          <p:cNvPr id="15" name="때 3"/>
           <p:cNvSpPr/>
           <p:nvPr/>
         </p:nvSpPr>
         <p:spPr>
           <a:xfrm>
-            <a:off x="7212901" y="3108960"/>
+            <a:off x="7258621" y="3337560"/>
             <a:ext cx="402336" cy="402336"/>
           </a:xfrm>
           <a:prstGeom prst="ellipse">
             <a:avLst/>
           </a:prstGeom>
           <a:solidFill>
-            <a:srgbClr val="DF3A55"/>
+            <a:srgbClr val="ED97A5"/>
           </a:solidFill>
           <a:ln w="38100">
             <a:solidFill>
@@ -4483,14 +4655,14 @@
       </p:sp>
       <p:sp>
         <p:nvSpPr>
-          <p:cNvPr id="15" name="TextBox 14"/>
+          <p:cNvPr id="16" name="TextBox 15"/>
           <p:cNvSpPr txBox="1"/>
           <p:nvPr/>
         </p:nvSpPr>
         <p:spPr>
           <a:xfrm>
-            <a:off x="6141567" y="2468880"/>
-            <a:ext cx="2545003" cy="457200"/>
+            <a:off x="6141567" y="2697480"/>
+            <a:ext cx="2636443" cy="457200"/>
           </a:xfrm>
           <a:prstGeom prst="rect">
             <a:avLst/>
@@ -4511,7 +4683,7 @@
             <a:r>
               <a:rPr sz="1600" b="1" i="0">
                 <a:solidFill>
-                  <a:srgbClr val="DF3A55"/>
+                  <a:srgbClr val="ED97A5"/>
                 </a:solidFill>
               </a:rPr>
               <a:t>가장 웃었던 날</a:t>
@@ -4521,14 +4693,14 @@
       </p:sp>
       <p:sp>
         <p:nvSpPr>
-          <p:cNvPr id="16" name="TextBox 15"/>
+          <p:cNvPr id="17" name="TextBox 16"/>
           <p:cNvSpPr txBox="1"/>
           <p:nvPr/>
         </p:nvSpPr>
         <p:spPr>
           <a:xfrm>
-            <a:off x="6187287" y="3657600"/>
-            <a:ext cx="2453563" cy="457200"/>
+            <a:off x="6187287" y="3886200"/>
+            <a:ext cx="2545003" cy="457200"/>
           </a:xfrm>
           <a:prstGeom prst="rect">
             <a:avLst/>
@@ -4549,7 +4721,7 @@
             <a:r>
               <a:rPr sz="1800" b="1" i="0">
                 <a:solidFill>
-                  <a:srgbClr val="721D2B"/>
+                  <a:srgbClr val="49272D"/>
                 </a:solidFill>
               </a:rPr>
               <a:t>잊지 못할 순간</a:t>
@@ -4559,14 +4731,14 @@
       </p:sp>
       <p:sp>
         <p:nvSpPr>
-          <p:cNvPr id="17" name="TextBox 16"/>
+          <p:cNvPr id="18" name="TextBox 17"/>
           <p:cNvSpPr txBox="1"/>
           <p:nvPr/>
         </p:nvSpPr>
         <p:spPr>
           <a:xfrm>
-            <a:off x="6187287" y="4160520"/>
-            <a:ext cx="2453563" cy="1645920"/>
+            <a:off x="6187287" y="4389120"/>
+            <a:ext cx="2545003" cy="1645920"/>
           </a:xfrm>
           <a:prstGeom prst="rect">
             <a:avLst/>
@@ -4587,7 +4759,7 @@
             <a:r>
               <a:rPr sz="1500" b="0" i="0">
                 <a:solidFill>
-                  <a:srgbClr val="2B2B2B"/>
+                  <a:srgbClr val="26231F"/>
                 </a:solidFill>
               </a:rPr>
               <a:t>사진으로 남겨 두세요</a:t>
@@ -4597,20 +4769,20 @@
       </p:sp>
       <p:sp>
         <p:nvSpPr>
-          <p:cNvPr id="18" name="때 4"/>
+          <p:cNvPr id="19" name="때 4"/>
           <p:cNvSpPr/>
           <p:nvPr/>
         </p:nvSpPr>
         <p:spPr>
           <a:xfrm>
-            <a:off x="9849345" y="3108960"/>
+            <a:off x="9986505" y="3337560"/>
             <a:ext cx="402336" cy="402336"/>
           </a:xfrm>
           <a:prstGeom prst="ellipse">
             <a:avLst/>
           </a:prstGeom>
           <a:solidFill>
-            <a:srgbClr val="DF3A55"/>
+            <a:srgbClr val="ED97A5"/>
           </a:solidFill>
           <a:ln w="38100">
             <a:solidFill>
@@ -4628,14 +4800,14 @@
       </p:sp>
       <p:sp>
         <p:nvSpPr>
-          <p:cNvPr id="19" name="TextBox 18"/>
+          <p:cNvPr id="20" name="TextBox 19"/>
           <p:cNvSpPr txBox="1"/>
           <p:nvPr/>
         </p:nvSpPr>
         <p:spPr>
           <a:xfrm>
-            <a:off x="8778011" y="2468880"/>
-            <a:ext cx="2545003" cy="457200"/>
+            <a:off x="8869451" y="2697480"/>
+            <a:ext cx="2636443" cy="457200"/>
           </a:xfrm>
           <a:prstGeom prst="rect">
             <a:avLst/>
@@ -4656,7 +4828,7 @@
             <a:r>
               <a:rPr sz="1600" b="1" i="0">
                 <a:solidFill>
-                  <a:srgbClr val="DF3A55"/>
+                  <a:srgbClr val="ED97A5"/>
                 </a:solidFill>
               </a:rPr>
               <a:t>지금</a:t>
@@ -4666,14 +4838,14 @@
       </p:sp>
       <p:sp>
         <p:nvSpPr>
-          <p:cNvPr id="20" name="TextBox 19"/>
+          <p:cNvPr id="21" name="TextBox 20"/>
           <p:cNvSpPr txBox="1"/>
           <p:nvPr/>
         </p:nvSpPr>
         <p:spPr>
           <a:xfrm>
-            <a:off x="8823731" y="3657600"/>
-            <a:ext cx="2453563" cy="457200"/>
+            <a:off x="8915171" y="3886200"/>
+            <a:ext cx="2545003" cy="457200"/>
           </a:xfrm>
           <a:prstGeom prst="rect">
             <a:avLst/>
@@ -4694,7 +4866,7 @@
             <a:r>
               <a:rPr sz="1800" b="1" i="0">
                 <a:solidFill>
-                  <a:srgbClr val="721D2B"/>
+                  <a:srgbClr val="49272D"/>
                 </a:solidFill>
               </a:rPr>
               <a:t>오늘의 우리</a:t>
@@ -4704,14 +4876,14 @@
       </p:sp>
       <p:sp>
         <p:nvSpPr>
-          <p:cNvPr id="21" name="TextBox 20"/>
+          <p:cNvPr id="22" name="TextBox 21"/>
           <p:cNvSpPr txBox="1"/>
           <p:nvPr/>
         </p:nvSpPr>
         <p:spPr>
           <a:xfrm>
-            <a:off x="8823731" y="4160520"/>
-            <a:ext cx="2453563" cy="1645920"/>
+            <a:off x="8915171" y="4389120"/>
+            <a:ext cx="2545003" cy="1645920"/>
           </a:xfrm>
           <a:prstGeom prst="rect">
             <a:avLst/>
@@ -4732,7 +4904,7 @@
             <a:r>
               <a:rPr sz="1500" b="0" i="0">
                 <a:solidFill>
-                  <a:srgbClr val="2B2B2B"/>
+                  <a:srgbClr val="26231F"/>
                 </a:solidFill>
               </a:rPr>
               <a:t>요즘 우리 이야기</a:t>
@@ -4754,7 +4926,7 @@
     <p:bg>
       <p:bgPr>
         <a:solidFill>
-          <a:srgbClr val="FCF3F4"/>
+          <a:srgbClr val="FFFFFF"/>
         </a:solidFill>
         <a:effectLst/>
       </p:bgPr>
@@ -4774,46 +4946,86 @@
         </p:nvSpPr>
         <p:spPr>
           <a:xfrm>
-            <a:off x="256032" y="256032"/>
-            <a:ext cx="11679631" cy="6345936"/>
+            <a:off x="640080" y="566928"/>
+            <a:ext cx="64008" cy="868680"/>
+          </a:xfrm>
+          <a:prstGeom prst="roundRect">
+            <a:avLst>
+              <a:gd name="adj" fmla="val 50000"/>
+            </a:avLst>
+          </a:prstGeom>
+          <a:solidFill>
+            <a:srgbClr val="ED97A5"/>
+          </a:solidFill>
+          <a:ln>
+            <a:noFill/>
+          </a:ln>
+        </p:spPr>
+        <p:txBody>
+          <a:bodyPr rtlCol="0" anchor="ctr"/>
+          <a:lstStyle/>
+          <a:p>
+            <a:pPr algn="ctr"/>
+          </a:p>
+        </p:txBody>
+      </p:sp>
+      <p:sp>
+        <p:nvSpPr>
+          <p:cNvPr id="4" name="상단 라벨"/>
+          <p:cNvSpPr txBox="1"/>
+          <p:nvPr/>
+        </p:nvSpPr>
+        <p:spPr>
+          <a:xfrm>
+            <a:off x="868680" y="274320"/>
+            <a:ext cx="5486400" cy="274320"/>
           </a:xfrm>
           <a:prstGeom prst="rect">
             <a:avLst/>
           </a:prstGeom>
           <a:noFill/>
-          <a:ln w="28575">
-            <a:solidFill>
-              <a:srgbClr val="DF3A55"/>
-            </a:solidFill>
-          </a:ln>
-        </p:spPr>
-        <p:txBody>
-          <a:bodyPr rtlCol="0" anchor="ctr"/>
-          <a:lstStyle/>
-          <a:p>
-            <a:pPr algn="ctr"/>
-          </a:p>
-        </p:txBody>
-      </p:sp>
-      <p:sp>
-        <p:nvSpPr>
-          <p:cNvPr id="4" name="장식"/>
+        </p:spPr>
+        <p:txBody>
+          <a:bodyPr wrap="square" lIns="54864" rIns="54864" tIns="27432" bIns="27432" anchor="ctr">
+            <a:noAutofit/>
+          </a:bodyPr>
+          <a:lstStyle/>
+          <a:p>
+            <a:pPr algn="l">
+              <a:lnSpc>
+                <a:spcPct val="115000"/>
+              </a:lnSpc>
+            </a:pPr>
+            <a:r>
+              <a:rPr sz="900" b="1" i="0" spc="250">
+                <a:solidFill>
+                  <a:srgbClr val="8E8780"/>
+                </a:solidFill>
+              </a:rPr>
+              <a:t>FAMILY ALBUM</a:t>
+            </a:r>
+          </a:p>
+        </p:txBody>
+      </p:sp>
+      <p:sp>
+        <p:nvSpPr>
+          <p:cNvPr id="5" name="포인트"/>
           <p:cNvSpPr/>
           <p:nvPr/>
         </p:nvSpPr>
         <p:spPr>
           <a:xfrm>
-            <a:off x="384048" y="384048"/>
-            <a:ext cx="11423599" cy="6089904"/>
-          </a:xfrm>
-          <a:prstGeom prst="rect">
+            <a:off x="11167567" y="667512"/>
+            <a:ext cx="310896" cy="310896"/>
+          </a:xfrm>
+          <a:prstGeom prst="star4">
             <a:avLst/>
           </a:prstGeom>
-          <a:noFill/>
-          <a:ln w="9525">
-            <a:solidFill>
-              <a:srgbClr val="F7D4DA"/>
-            </a:solidFill>
+          <a:solidFill>
+            <a:srgbClr val="F2A6B3"/>
+          </a:solidFill>
+          <a:ln>
+            <a:noFill/>
           </a:ln>
         </p:spPr>
         <p:txBody>
@@ -4836,8 +5048,8 @@
         </p:nvSpPr>
         <p:spPr>
           <a:xfrm>
-            <a:off x="822960" y="548640"/>
-            <a:ext cx="9265615" cy="822960"/>
+            <a:off x="868680" y="566928"/>
+            <a:ext cx="9448495" cy="868680"/>
           </a:xfrm>
         </p:spPr>
         <p:txBody>
@@ -4854,7 +5066,7 @@
             <a:r>
               <a:rPr sz="3000" b="1" i="0">
                 <a:solidFill>
-                  <a:srgbClr val="721D2B"/>
+                  <a:srgbClr val="26231F"/>
                 </a:solidFill>
               </a:rPr>
               <a:t>우리 가족의 약속</a:t>
@@ -4864,26 +5076,24 @@
       </p:sp>
       <p:sp>
         <p:nvSpPr>
-          <p:cNvPr id="5" name="줄 1"/>
+          <p:cNvPr id="6" name="줄 1"/>
           <p:cNvSpPr/>
           <p:nvPr/>
         </p:nvSpPr>
         <p:spPr>
           <a:xfrm>
-            <a:off x="822960" y="1554480"/>
-            <a:ext cx="10545775" cy="1005840"/>
+            <a:off x="640080" y="1783080"/>
+            <a:ext cx="10911535" cy="1005840"/>
           </a:xfrm>
           <a:prstGeom prst="roundRect">
             <a:avLst>
-              <a:gd name="adj" fmla="val 8000"/>
+              <a:gd name="adj" fmla="val 7000"/>
             </a:avLst>
           </a:prstGeom>
-          <a:solidFill>
-            <a:srgbClr val="FCF3F4"/>
-          </a:solidFill>
-          <a:ln w="12700">
+          <a:noFill/>
+          <a:ln w="15875">
             <a:solidFill>
-              <a:srgbClr val="F7D4DA"/>
+              <a:srgbClr val="ED97A5"/>
             </a:solidFill>
           </a:ln>
         </p:spPr>
@@ -4897,23 +5107,23 @@
       </p:sp>
       <p:sp>
         <p:nvSpPr>
-          <p:cNvPr id="6" name="번호 1"/>
+          <p:cNvPr id="7" name="번호 1"/>
           <p:cNvSpPr/>
           <p:nvPr/>
         </p:nvSpPr>
         <p:spPr>
           <a:xfrm>
-            <a:off x="1005840" y="1828800"/>
+            <a:off x="822959" y="2057400"/>
             <a:ext cx="457200" cy="457200"/>
           </a:xfrm>
           <a:prstGeom prst="ellipse">
             <a:avLst/>
           </a:prstGeom>
-          <a:solidFill>
-            <a:srgbClr val="DF3A55"/>
-          </a:solidFill>
-          <a:ln>
-            <a:noFill/>
+          <a:noFill/>
+          <a:ln w="19050">
+            <a:solidFill>
+              <a:srgbClr val="ED97A5"/>
+            </a:solidFill>
           </a:ln>
         </p:spPr>
         <p:txBody>
@@ -4930,7 +5140,7 @@
             <a:r>
               <a:rPr sz="1600" b="1" i="0">
                 <a:solidFill>
-                  <a:srgbClr val="FFFFFF"/>
+                  <a:srgbClr val="49272D"/>
                 </a:solidFill>
               </a:rPr>
               <a:t>1</a:t>
@@ -4940,13 +5150,13 @@
       </p:sp>
       <p:sp>
         <p:nvSpPr>
-          <p:cNvPr id="7" name="TextBox 6"/>
+          <p:cNvPr id="8" name="TextBox 7"/>
           <p:cNvSpPr txBox="1"/>
           <p:nvPr/>
         </p:nvSpPr>
         <p:spPr>
           <a:xfrm>
-            <a:off x="1691640" y="1600200"/>
+            <a:off x="1508760" y="1828800"/>
             <a:ext cx="2743200" cy="914400"/>
           </a:xfrm>
           <a:prstGeom prst="rect">
@@ -4968,7 +5178,7 @@
             <a:r>
               <a:rPr sz="1800" b="1" i="0">
                 <a:solidFill>
-                  <a:srgbClr val="721D2B"/>
+                  <a:srgbClr val="49272D"/>
                 </a:solidFill>
               </a:rPr>
               <a:t>약속 1</a:t>
@@ -4978,14 +5188,14 @@
       </p:sp>
       <p:sp>
         <p:nvSpPr>
-          <p:cNvPr id="8" name="TextBox 7"/>
+          <p:cNvPr id="9" name="TextBox 8"/>
           <p:cNvSpPr txBox="1"/>
           <p:nvPr/>
         </p:nvSpPr>
         <p:spPr>
           <a:xfrm>
-            <a:off x="4480560" y="1600200"/>
-            <a:ext cx="6705295" cy="914400"/>
+            <a:off x="4297680" y="1828800"/>
+            <a:ext cx="7071055" cy="914400"/>
           </a:xfrm>
           <a:prstGeom prst="rect">
             <a:avLst/>
@@ -5006,7 +5216,7 @@
             <a:r>
               <a:rPr sz="1700" b="0" i="0">
                 <a:solidFill>
-                  <a:srgbClr val="2B2B2B"/>
+                  <a:srgbClr val="26231F"/>
                 </a:solidFill>
               </a:rPr>
               <a:t>산책은 하루도 거르지 않기</a:t>
@@ -5016,26 +5226,24 @@
       </p:sp>
       <p:sp>
         <p:nvSpPr>
-          <p:cNvPr id="9" name="줄 2"/>
+          <p:cNvPr id="10" name="줄 2"/>
           <p:cNvSpPr/>
           <p:nvPr/>
         </p:nvSpPr>
         <p:spPr>
           <a:xfrm>
-            <a:off x="822960" y="2697480"/>
-            <a:ext cx="10545775" cy="1005840"/>
+            <a:off x="640080" y="2926080"/>
+            <a:ext cx="10911535" cy="1005840"/>
           </a:xfrm>
           <a:prstGeom prst="roundRect">
             <a:avLst>
-              <a:gd name="adj" fmla="val 8000"/>
+              <a:gd name="adj" fmla="val 7000"/>
             </a:avLst>
           </a:prstGeom>
-          <a:solidFill>
-            <a:srgbClr val="FCF3F4"/>
-          </a:solidFill>
-          <a:ln w="12700">
+          <a:noFill/>
+          <a:ln w="15875">
             <a:solidFill>
-              <a:srgbClr val="F7D4DA"/>
+              <a:srgbClr val="ED97A5"/>
             </a:solidFill>
           </a:ln>
         </p:spPr>
@@ -5049,23 +5257,23 @@
       </p:sp>
       <p:sp>
         <p:nvSpPr>
-          <p:cNvPr id="10" name="번호 2"/>
+          <p:cNvPr id="11" name="번호 2"/>
           <p:cNvSpPr/>
           <p:nvPr/>
         </p:nvSpPr>
         <p:spPr>
           <a:xfrm>
-            <a:off x="1005840" y="2971800"/>
+            <a:off x="822959" y="3200400"/>
             <a:ext cx="457200" cy="457200"/>
           </a:xfrm>
           <a:prstGeom prst="ellipse">
             <a:avLst/>
           </a:prstGeom>
-          <a:solidFill>
-            <a:srgbClr val="DF3A55"/>
-          </a:solidFill>
-          <a:ln>
-            <a:noFill/>
+          <a:noFill/>
+          <a:ln w="19050">
+            <a:solidFill>
+              <a:srgbClr val="ED97A5"/>
+            </a:solidFill>
           </a:ln>
         </p:spPr>
         <p:txBody>
@@ -5082,7 +5290,7 @@
             <a:r>
               <a:rPr sz="1600" b="1" i="0">
                 <a:solidFill>
-                  <a:srgbClr val="FFFFFF"/>
+                  <a:srgbClr val="49272D"/>
                 </a:solidFill>
               </a:rPr>
               <a:t>2</a:t>
@@ -5092,13 +5300,13 @@
       </p:sp>
       <p:sp>
         <p:nvSpPr>
-          <p:cNvPr id="11" name="TextBox 10"/>
+          <p:cNvPr id="12" name="TextBox 11"/>
           <p:cNvSpPr txBox="1"/>
           <p:nvPr/>
         </p:nvSpPr>
         <p:spPr>
           <a:xfrm>
-            <a:off x="1691640" y="2743200"/>
+            <a:off x="1508760" y="2971800"/>
             <a:ext cx="2743200" cy="914400"/>
           </a:xfrm>
           <a:prstGeom prst="rect">
@@ -5120,7 +5328,7 @@
             <a:r>
               <a:rPr sz="1800" b="1" i="0">
                 <a:solidFill>
-                  <a:srgbClr val="721D2B"/>
+                  <a:srgbClr val="49272D"/>
                 </a:solidFill>
               </a:rPr>
               <a:t>약속 2</a:t>
@@ -5130,14 +5338,14 @@
       </p:sp>
       <p:sp>
         <p:nvSpPr>
-          <p:cNvPr id="12" name="TextBox 11"/>
+          <p:cNvPr id="13" name="TextBox 12"/>
           <p:cNvSpPr txBox="1"/>
           <p:nvPr/>
         </p:nvSpPr>
         <p:spPr>
           <a:xfrm>
-            <a:off x="4480560" y="2743200"/>
-            <a:ext cx="6705295" cy="914400"/>
+            <a:off x="4297680" y="2971800"/>
+            <a:ext cx="7071055" cy="914400"/>
           </a:xfrm>
           <a:prstGeom prst="rect">
             <a:avLst/>
@@ -5158,7 +5366,7 @@
             <a:r>
               <a:rPr sz="1700" b="0" i="0">
                 <a:solidFill>
-                  <a:srgbClr val="2B2B2B"/>
+                  <a:srgbClr val="26231F"/>
                 </a:solidFill>
               </a:rPr>
               <a:t>건강 검진 날짜 챙기기</a:t>
@@ -5168,26 +5376,24 @@
       </p:sp>
       <p:sp>
         <p:nvSpPr>
-          <p:cNvPr id="13" name="줄 3"/>
+          <p:cNvPr id="14" name="줄 3"/>
           <p:cNvSpPr/>
           <p:nvPr/>
         </p:nvSpPr>
         <p:spPr>
           <a:xfrm>
-            <a:off x="822960" y="3840480"/>
-            <a:ext cx="10545775" cy="1005840"/>
+            <a:off x="640080" y="4069080"/>
+            <a:ext cx="10911535" cy="1005840"/>
           </a:xfrm>
           <a:prstGeom prst="roundRect">
             <a:avLst>
-              <a:gd name="adj" fmla="val 8000"/>
+              <a:gd name="adj" fmla="val 7000"/>
             </a:avLst>
           </a:prstGeom>
-          <a:solidFill>
-            <a:srgbClr val="FCF3F4"/>
-          </a:solidFill>
-          <a:ln w="12700">
+          <a:noFill/>
+          <a:ln w="15875">
             <a:solidFill>
-              <a:srgbClr val="F7D4DA"/>
+              <a:srgbClr val="ED97A5"/>
             </a:solidFill>
           </a:ln>
         </p:spPr>
@@ -5201,23 +5407,23 @@
       </p:sp>
       <p:sp>
         <p:nvSpPr>
-          <p:cNvPr id="14" name="번호 3"/>
+          <p:cNvPr id="15" name="번호 3"/>
           <p:cNvSpPr/>
           <p:nvPr/>
         </p:nvSpPr>
         <p:spPr>
           <a:xfrm>
-            <a:off x="1005840" y="4114800"/>
+            <a:off x="822959" y="4343400"/>
             <a:ext cx="457200" cy="457200"/>
           </a:xfrm>
           <a:prstGeom prst="ellipse">
             <a:avLst/>
           </a:prstGeom>
-          <a:solidFill>
-            <a:srgbClr val="DF3A55"/>
-          </a:solidFill>
-          <a:ln>
-            <a:noFill/>
+          <a:noFill/>
+          <a:ln w="19050">
+            <a:solidFill>
+              <a:srgbClr val="ED97A5"/>
+            </a:solidFill>
           </a:ln>
         </p:spPr>
         <p:txBody>
@@ -5234,7 +5440,7 @@
             <a:r>
               <a:rPr sz="1600" b="1" i="0">
                 <a:solidFill>
-                  <a:srgbClr val="FFFFFF"/>
+                  <a:srgbClr val="49272D"/>
                 </a:solidFill>
               </a:rPr>
               <a:t>3</a:t>
@@ -5244,13 +5450,13 @@
       </p:sp>
       <p:sp>
         <p:nvSpPr>
-          <p:cNvPr id="15" name="TextBox 14"/>
+          <p:cNvPr id="16" name="TextBox 15"/>
           <p:cNvSpPr txBox="1"/>
           <p:nvPr/>
         </p:nvSpPr>
         <p:spPr>
           <a:xfrm>
-            <a:off x="1691640" y="3886200"/>
+            <a:off x="1508760" y="4114800"/>
             <a:ext cx="2743200" cy="914400"/>
           </a:xfrm>
           <a:prstGeom prst="rect">
@@ -5272,7 +5478,7 @@
             <a:r>
               <a:rPr sz="1800" b="1" i="0">
                 <a:solidFill>
-                  <a:srgbClr val="721D2B"/>
+                  <a:srgbClr val="49272D"/>
                 </a:solidFill>
               </a:rPr>
               <a:t>약속 3</a:t>
@@ -5282,14 +5488,14 @@
       </p:sp>
       <p:sp>
         <p:nvSpPr>
-          <p:cNvPr id="16" name="TextBox 15"/>
+          <p:cNvPr id="17" name="TextBox 16"/>
           <p:cNvSpPr txBox="1"/>
           <p:nvPr/>
         </p:nvSpPr>
         <p:spPr>
           <a:xfrm>
-            <a:off x="4480560" y="3886200"/>
-            <a:ext cx="6705295" cy="914400"/>
+            <a:off x="4297680" y="4114800"/>
+            <a:ext cx="7071055" cy="914400"/>
           </a:xfrm>
           <a:prstGeom prst="rect">
             <a:avLst/>
@@ -5310,7 +5516,7 @@
             <a:r>
               <a:rPr sz="1700" b="0" i="0">
                 <a:solidFill>
-                  <a:srgbClr val="2B2B2B"/>
+                  <a:srgbClr val="26231F"/>
                 </a:solidFill>
               </a:rPr>
               <a:t>많이 안아 주고 많이 칭찬하기</a:t>
@@ -5332,7 +5538,7 @@
     <p:bg>
       <p:bgPr>
         <a:solidFill>
-          <a:srgbClr val="FCF3F4"/>
+          <a:srgbClr val="FFFFFF"/>
         </a:solidFill>
         <a:effectLst/>
       </p:bgPr>
@@ -5352,46 +5558,86 @@
         </p:nvSpPr>
         <p:spPr>
           <a:xfrm>
-            <a:off x="256032" y="256032"/>
-            <a:ext cx="11679631" cy="6345936"/>
+            <a:off x="640080" y="566928"/>
+            <a:ext cx="64008" cy="868680"/>
+          </a:xfrm>
+          <a:prstGeom prst="roundRect">
+            <a:avLst>
+              <a:gd name="adj" fmla="val 50000"/>
+            </a:avLst>
+          </a:prstGeom>
+          <a:solidFill>
+            <a:srgbClr val="ED97A5"/>
+          </a:solidFill>
+          <a:ln>
+            <a:noFill/>
+          </a:ln>
+        </p:spPr>
+        <p:txBody>
+          <a:bodyPr rtlCol="0" anchor="ctr"/>
+          <a:lstStyle/>
+          <a:p>
+            <a:pPr algn="ctr"/>
+          </a:p>
+        </p:txBody>
+      </p:sp>
+      <p:sp>
+        <p:nvSpPr>
+          <p:cNvPr id="4" name="상단 라벨"/>
+          <p:cNvSpPr txBox="1"/>
+          <p:nvPr/>
+        </p:nvSpPr>
+        <p:spPr>
+          <a:xfrm>
+            <a:off x="868680" y="274320"/>
+            <a:ext cx="5486400" cy="274320"/>
           </a:xfrm>
           <a:prstGeom prst="rect">
             <a:avLst/>
           </a:prstGeom>
           <a:noFill/>
-          <a:ln w="28575">
-            <a:solidFill>
-              <a:srgbClr val="DF3A55"/>
-            </a:solidFill>
-          </a:ln>
-        </p:spPr>
-        <p:txBody>
-          <a:bodyPr rtlCol="0" anchor="ctr"/>
-          <a:lstStyle/>
-          <a:p>
-            <a:pPr algn="ctr"/>
-          </a:p>
-        </p:txBody>
-      </p:sp>
-      <p:sp>
-        <p:nvSpPr>
-          <p:cNvPr id="4" name="장식"/>
+        </p:spPr>
+        <p:txBody>
+          <a:bodyPr wrap="square" lIns="54864" rIns="54864" tIns="27432" bIns="27432" anchor="ctr">
+            <a:noAutofit/>
+          </a:bodyPr>
+          <a:lstStyle/>
+          <a:p>
+            <a:pPr algn="l">
+              <a:lnSpc>
+                <a:spcPct val="115000"/>
+              </a:lnSpc>
+            </a:pPr>
+            <a:r>
+              <a:rPr sz="900" b="1" i="0" spc="250">
+                <a:solidFill>
+                  <a:srgbClr val="8E8780"/>
+                </a:solidFill>
+              </a:rPr>
+              <a:t>FAMILY ALBUM</a:t>
+            </a:r>
+          </a:p>
+        </p:txBody>
+      </p:sp>
+      <p:sp>
+        <p:nvSpPr>
+          <p:cNvPr id="5" name="포인트"/>
           <p:cNvSpPr/>
           <p:nvPr/>
         </p:nvSpPr>
         <p:spPr>
           <a:xfrm>
-            <a:off x="384048" y="384048"/>
-            <a:ext cx="11423599" cy="6089904"/>
-          </a:xfrm>
-          <a:prstGeom prst="rect">
+            <a:off x="11167567" y="667512"/>
+            <a:ext cx="310896" cy="310896"/>
+          </a:xfrm>
+          <a:prstGeom prst="star4">
             <a:avLst/>
           </a:prstGeom>
-          <a:noFill/>
-          <a:ln w="9525">
-            <a:solidFill>
-              <a:srgbClr val="F7D4DA"/>
-            </a:solidFill>
+          <a:solidFill>
+            <a:srgbClr val="F2A6B3"/>
+          </a:solidFill>
+          <a:ln>
+            <a:noFill/>
           </a:ln>
         </p:spPr>
         <p:txBody>
@@ -5414,8 +5660,8 @@
         </p:nvSpPr>
         <p:spPr>
           <a:xfrm>
-            <a:off x="822960" y="548640"/>
-            <a:ext cx="9265615" cy="822960"/>
+            <a:off x="868680" y="566928"/>
+            <a:ext cx="9448495" cy="868680"/>
           </a:xfrm>
         </p:spPr>
         <p:txBody>
@@ -5432,7 +5678,7 @@
             <a:r>
               <a:rPr sz="3000" b="1" i="0">
                 <a:solidFill>
-                  <a:srgbClr val="721D2B"/>
+                  <a:srgbClr val="26231F"/>
                 </a:solidFill>
               </a:rPr>
               <a:t>가족 사진</a:t>
@@ -5442,14 +5688,14 @@
       </p:sp>
       <p:sp>
         <p:nvSpPr>
-          <p:cNvPr id="5" name="사진 자리"/>
+          <p:cNvPr id="6" name="사진 자리"/>
           <p:cNvSpPr/>
           <p:nvPr/>
         </p:nvSpPr>
         <p:spPr>
           <a:xfrm>
-            <a:off x="822960" y="1554480"/>
-            <a:ext cx="3393338" cy="2217420"/>
+            <a:off x="640080" y="1783080"/>
+            <a:ext cx="3515258" cy="2194560"/>
           </a:xfrm>
           <a:prstGeom prst="roundRect">
             <a:avLst>
@@ -5457,12 +5703,10 @@
             </a:avLst>
           </a:prstGeom>
           <a:solidFill>
-            <a:srgbClr val="F7D4DA"/>
+            <a:srgbClr val="FAD1D8"/>
           </a:solidFill>
           <a:ln w="19050">
-            <a:solidFill>
-              <a:srgbClr val="DF3A55"/>
-            </a:solidFill>
+            <a:noFill/>
             <a:prstDash val="dash"/>
           </a:ln>
         </p:spPr>
@@ -5480,7 +5724,7 @@
             <a:r>
               <a:rPr sz="1200" b="0" i="0">
                 <a:solidFill>
-                  <a:srgbClr val="721D2B"/>
+                  <a:srgbClr val="8E8780"/>
                 </a:solidFill>
               </a:rPr>
               <a:t>사진 1</a:t>
@@ -5490,14 +5734,14 @@
       </p:sp>
       <p:sp>
         <p:nvSpPr>
-          <p:cNvPr id="6" name="사진 자리"/>
+          <p:cNvPr id="7" name="사진 자리"/>
           <p:cNvSpPr/>
           <p:nvPr/>
         </p:nvSpPr>
         <p:spPr>
           <a:xfrm>
-            <a:off x="4399178" y="1554480"/>
-            <a:ext cx="3393338" cy="2217420"/>
+            <a:off x="4338218" y="1783080"/>
+            <a:ext cx="3515258" cy="2194560"/>
           </a:xfrm>
           <a:prstGeom prst="roundRect">
             <a:avLst>
@@ -5505,12 +5749,10 @@
             </a:avLst>
           </a:prstGeom>
           <a:solidFill>
-            <a:srgbClr val="F7D4DA"/>
+            <a:srgbClr val="FAD1D8"/>
           </a:solidFill>
           <a:ln w="19050">
-            <a:solidFill>
-              <a:srgbClr val="DF3A55"/>
-            </a:solidFill>
+            <a:noFill/>
             <a:prstDash val="dash"/>
           </a:ln>
         </p:spPr>
@@ -5528,7 +5770,7 @@
             <a:r>
               <a:rPr sz="1200" b="0" i="0">
                 <a:solidFill>
-                  <a:srgbClr val="721D2B"/>
+                  <a:srgbClr val="8E8780"/>
                 </a:solidFill>
               </a:rPr>
               <a:t>사진 2</a:t>
@@ -5538,14 +5780,14 @@
       </p:sp>
       <p:sp>
         <p:nvSpPr>
-          <p:cNvPr id="7" name="사진 자리"/>
+          <p:cNvPr id="8" name="사진 자리"/>
           <p:cNvSpPr/>
           <p:nvPr/>
         </p:nvSpPr>
         <p:spPr>
           <a:xfrm>
-            <a:off x="7975396" y="1554480"/>
-            <a:ext cx="3393338" cy="2217420"/>
+            <a:off x="8036356" y="1783080"/>
+            <a:ext cx="3515258" cy="2194560"/>
           </a:xfrm>
           <a:prstGeom prst="roundRect">
             <a:avLst>
@@ -5553,12 +5795,10 @@
             </a:avLst>
           </a:prstGeom>
           <a:solidFill>
-            <a:srgbClr val="F7D4DA"/>
+            <a:srgbClr val="FAD1D8"/>
           </a:solidFill>
           <a:ln w="19050">
-            <a:solidFill>
-              <a:srgbClr val="DF3A55"/>
-            </a:solidFill>
+            <a:noFill/>
             <a:prstDash val="dash"/>
           </a:ln>
         </p:spPr>
@@ -5576,7 +5816,7 @@
             <a:r>
               <a:rPr sz="1200" b="0" i="0">
                 <a:solidFill>
-                  <a:srgbClr val="721D2B"/>
+                  <a:srgbClr val="8E8780"/>
                 </a:solidFill>
               </a:rPr>
               <a:t>사진 3</a:t>
@@ -5586,14 +5826,14 @@
       </p:sp>
       <p:sp>
         <p:nvSpPr>
-          <p:cNvPr id="8" name="사진 자리"/>
+          <p:cNvPr id="9" name="사진 자리"/>
           <p:cNvSpPr/>
           <p:nvPr/>
         </p:nvSpPr>
         <p:spPr>
           <a:xfrm>
-            <a:off x="822960" y="3954780"/>
-            <a:ext cx="3393338" cy="2217420"/>
+            <a:off x="640080" y="4160520"/>
+            <a:ext cx="3515258" cy="2194560"/>
           </a:xfrm>
           <a:prstGeom prst="roundRect">
             <a:avLst>
@@ -5601,12 +5841,10 @@
             </a:avLst>
           </a:prstGeom>
           <a:solidFill>
-            <a:srgbClr val="F7D4DA"/>
+            <a:srgbClr val="FAD1D8"/>
           </a:solidFill>
           <a:ln w="19050">
-            <a:solidFill>
-              <a:srgbClr val="DF3A55"/>
-            </a:solidFill>
+            <a:noFill/>
             <a:prstDash val="dash"/>
           </a:ln>
         </p:spPr>
@@ -5624,7 +5862,7 @@
             <a:r>
               <a:rPr sz="1200" b="0" i="0">
                 <a:solidFill>
-                  <a:srgbClr val="721D2B"/>
+                  <a:srgbClr val="8E8780"/>
                 </a:solidFill>
               </a:rPr>
               <a:t>사진 4</a:t>
@@ -5634,14 +5872,14 @@
       </p:sp>
       <p:sp>
         <p:nvSpPr>
-          <p:cNvPr id="9" name="사진 자리"/>
+          <p:cNvPr id="10" name="사진 자리"/>
           <p:cNvSpPr/>
           <p:nvPr/>
         </p:nvSpPr>
         <p:spPr>
           <a:xfrm>
-            <a:off x="4399178" y="3954780"/>
-            <a:ext cx="3393338" cy="2217420"/>
+            <a:off x="4338218" y="4160520"/>
+            <a:ext cx="3515258" cy="2194560"/>
           </a:xfrm>
           <a:prstGeom prst="roundRect">
             <a:avLst>
@@ -5649,12 +5887,10 @@
             </a:avLst>
           </a:prstGeom>
           <a:solidFill>
-            <a:srgbClr val="F7D4DA"/>
+            <a:srgbClr val="FAD1D8"/>
           </a:solidFill>
           <a:ln w="19050">
-            <a:solidFill>
-              <a:srgbClr val="DF3A55"/>
-            </a:solidFill>
+            <a:noFill/>
             <a:prstDash val="dash"/>
           </a:ln>
         </p:spPr>
@@ -5672,7 +5908,7 @@
             <a:r>
               <a:rPr sz="1200" b="0" i="0">
                 <a:solidFill>
-                  <a:srgbClr val="721D2B"/>
+                  <a:srgbClr val="8E8780"/>
                 </a:solidFill>
               </a:rPr>
               <a:t>사진 5</a:t>
@@ -5682,14 +5918,14 @@
       </p:sp>
       <p:sp>
         <p:nvSpPr>
-          <p:cNvPr id="10" name="사진 자리"/>
+          <p:cNvPr id="11" name="사진 자리"/>
           <p:cNvSpPr/>
           <p:nvPr/>
         </p:nvSpPr>
         <p:spPr>
           <a:xfrm>
-            <a:off x="7975396" y="3954780"/>
-            <a:ext cx="3393338" cy="2217420"/>
+            <a:off x="8036356" y="4160520"/>
+            <a:ext cx="3515258" cy="2194560"/>
           </a:xfrm>
           <a:prstGeom prst="roundRect">
             <a:avLst>
@@ -5697,12 +5933,10 @@
             </a:avLst>
           </a:prstGeom>
           <a:solidFill>
-            <a:srgbClr val="F7D4DA"/>
+            <a:srgbClr val="FAD1D8"/>
           </a:solidFill>
           <a:ln w="19050">
-            <a:solidFill>
-              <a:srgbClr val="DF3A55"/>
-            </a:solidFill>
+            <a:noFill/>
             <a:prstDash val="dash"/>
           </a:ln>
         </p:spPr>
@@ -5720,7 +5954,7 @@
             <a:r>
               <a:rPr sz="1200" b="0" i="0">
                 <a:solidFill>
-                  <a:srgbClr val="721D2B"/>
+                  <a:srgbClr val="8E8780"/>
                 </a:solidFill>
               </a:rPr>
               <a:t>사진 6</a:t>
@@ -5739,6 +5973,14 @@
 <file path=ppt/slides/slide6.xml><?xml version="1.0" encoding="utf-8"?>
 <p:sld xmlns:a="http://schemas.openxmlformats.org/drawingml/2006/main" xmlns:p="http://schemas.openxmlformats.org/presentationml/2006/main" xmlns:r="http://schemas.openxmlformats.org/officeDocument/2006/relationships">
   <p:cSld>
+    <p:bg>
+      <p:bgPr>
+        <a:solidFill>
+          <a:srgbClr val="FDEAED"/>
+        </a:solidFill>
+        <a:effectLst/>
+      </p:bgPr>
+    </p:bg>
     <p:spTree>
       <p:nvGrpSpPr>
         <p:cNvPr id="1" name=""/>
@@ -5746,30 +5988,120 @@
         <p:nvPr/>
       </p:nvGrpSpPr>
       <p:grpSpPr/>
-      <p:pic>
-        <p:nvPicPr>
-          <p:cNvPr id="3" name="표지 그림" descr="family-10.jpg"/>
-          <p:cNvPicPr>
-            <a:picLocks noChangeAspect="1"/>
-          </p:cNvPicPr>
+      <p:sp>
+        <p:nvSpPr>
+          <p:cNvPr id="3" name="사진 자리"/>
+          <p:cNvSpPr/>
           <p:nvPr/>
-        </p:nvPicPr>
-        <p:blipFill>
-          <a:blip r:embed="rId2"/>
-          <a:stretch>
-            <a:fillRect/>
-          </a:stretch>
-        </p:blipFill>
-        <p:spPr>
-          <a:xfrm>
-            <a:off x="0" y="0"/>
-            <a:ext cx="12191695" cy="6858000"/>
+        </p:nvSpPr>
+        <p:spPr>
+          <a:xfrm>
+            <a:off x="1463003" y="960120"/>
+            <a:ext cx="3657508" cy="4526280"/>
+          </a:xfrm>
+          <a:prstGeom prst="roundRect">
+            <a:avLst>
+              <a:gd name="adj" fmla="val 4000"/>
+            </a:avLst>
+          </a:prstGeom>
+          <a:solidFill>
+            <a:srgbClr val="F2A6B3"/>
+          </a:solidFill>
+          <a:ln>
+            <a:noFill/>
+          </a:ln>
+        </p:spPr>
+        <p:txBody>
+          <a:bodyPr rtlCol="0" anchor="ctr" wrap="square" lIns="54864" rIns="54864" tIns="27432" bIns="27432">
+            <a:noAutofit/>
+          </a:bodyPr>
+          <a:lstStyle/>
+          <a:p>
+            <a:pPr algn="ctr">
+              <a:lnSpc>
+                <a:spcPct val="100000"/>
+              </a:lnSpc>
+            </a:pPr>
+            <a:r>
+              <a:rPr sz="1400" b="0" i="0">
+                <a:solidFill>
+                  <a:srgbClr val="49272D"/>
+                </a:solidFill>
+              </a:rPr>
+              <a:t>사진을 넣어 주세요</a:t>
+            </a:r>
+          </a:p>
+        </p:txBody>
+      </p:sp>
+      <p:sp>
+        <p:nvSpPr>
+          <p:cNvPr id="4" name="장식"/>
+          <p:cNvSpPr/>
+          <p:nvPr/>
+        </p:nvSpPr>
+        <p:spPr>
+          <a:xfrm>
+            <a:off x="975335" y="1234439"/>
+            <a:ext cx="3657508" cy="4526280"/>
+          </a:xfrm>
+          <a:prstGeom prst="roundRect">
+            <a:avLst>
+              <a:gd name="adj" fmla="val 4000"/>
+            </a:avLst>
+          </a:prstGeom>
+          <a:noFill/>
+          <a:ln w="9525">
+            <a:solidFill>
+              <a:srgbClr val="26231F"/>
+            </a:solidFill>
+          </a:ln>
+        </p:spPr>
+        <p:txBody>
+          <a:bodyPr rtlCol="0" anchor="ctr"/>
+          <a:lstStyle/>
+          <a:p>
+            <a:pPr algn="ctr"/>
+          </a:p>
+        </p:txBody>
+      </p:sp>
+      <p:sp>
+        <p:nvSpPr>
+          <p:cNvPr id="5" name="라벨"/>
+          <p:cNvSpPr txBox="1"/>
+          <p:nvPr/>
+        </p:nvSpPr>
+        <p:spPr>
+          <a:xfrm>
+            <a:off x="6827349" y="2148840"/>
+            <a:ext cx="4632844" cy="274320"/>
           </a:xfrm>
           <a:prstGeom prst="rect">
             <a:avLst/>
           </a:prstGeom>
-        </p:spPr>
-      </p:pic>
+          <a:noFill/>
+        </p:spPr>
+        <p:txBody>
+          <a:bodyPr wrap="square" lIns="54864" rIns="54864" tIns="27432" bIns="27432" anchor="t">
+            <a:noAutofit/>
+          </a:bodyPr>
+          <a:lstStyle/>
+          <a:p>
+            <a:pPr algn="l">
+              <a:lnSpc>
+                <a:spcPct val="115000"/>
+              </a:lnSpc>
+            </a:pPr>
+            <a:r>
+              <a:rPr sz="1000" b="1" i="0" spc="250">
+                <a:solidFill>
+                  <a:srgbClr val="26231F"/>
+                </a:solidFill>
+              </a:rPr>
+              <a:t>FAMILY ALBUM</a:t>
+            </a:r>
+          </a:p>
+        </p:txBody>
+      </p:sp>
       <p:sp>
         <p:nvSpPr>
           <p:cNvPr id="2" name="Title 1"/>
@@ -5782,8 +6114,8 @@
         </p:nvSpPr>
         <p:spPr>
           <a:xfrm>
-            <a:off x="853418" y="2057400"/>
-            <a:ext cx="6095847" cy="1554480"/>
+            <a:off x="6827349" y="2606040"/>
+            <a:ext cx="4632844" cy="1188720"/>
           </a:xfrm>
         </p:spPr>
         <p:txBody>
@@ -5798,9 +6130,9 @@
               </a:lnSpc>
             </a:pPr>
             <a:r>
-              <a:rPr sz="3600" b="1" i="0">
-                <a:solidFill>
-                  <a:srgbClr val="721D2B"/>
+              <a:rPr sz="4000" b="1" i="0">
+                <a:solidFill>
+                  <a:srgbClr val="26231F"/>
                 </a:solidFill>
               </a:rPr>
               <a:t>우리 가족 소개를 마칩니다</a:t>
@@ -5810,14 +6142,14 @@
       </p:sp>
       <p:sp>
         <p:nvSpPr>
-          <p:cNvPr id="4" name="한 줄 문구"/>
+          <p:cNvPr id="6" name="한 줄 문구"/>
           <p:cNvSpPr txBox="1"/>
           <p:nvPr/>
         </p:nvSpPr>
         <p:spPr>
           <a:xfrm>
-            <a:off x="853418" y="3749039"/>
-            <a:ext cx="6095847" cy="822960"/>
+            <a:off x="6827349" y="3886200"/>
+            <a:ext cx="4632844" cy="822960"/>
           </a:xfrm>
           <a:prstGeom prst="rect">
             <a:avLst/>
@@ -5836,9 +6168,9 @@
               </a:lnSpc>
             </a:pPr>
             <a:r>
-              <a:rPr sz="1700" b="0" i="1">
-                <a:solidFill>
-                  <a:srgbClr val="721D2B"/>
+              <a:rPr sz="1700" b="0" i="0">
+                <a:solidFill>
+                  <a:srgbClr val="26231F"/>
                 </a:solidFill>
               </a:rPr>
               <a:t>읽어 주셔서 고맙습니다</a:t>
@@ -5848,14 +6180,14 @@
       </p:sp>
       <p:sp>
         <p:nvSpPr>
-          <p:cNvPr id="5" name="안내 문구"/>
+          <p:cNvPr id="7" name="안내 문구"/>
           <p:cNvSpPr txBox="1"/>
           <p:nvPr/>
         </p:nvSpPr>
         <p:spPr>
           <a:xfrm>
-            <a:off x="853418" y="4617720"/>
-            <a:ext cx="6095847" cy="914400"/>
+            <a:off x="6827349" y="4754880"/>
+            <a:ext cx="4632844" cy="914400"/>
           </a:xfrm>
           <a:prstGeom prst="rect">
             <a:avLst/>
@@ -5876,7 +6208,7 @@
             <a:r>
               <a:rPr sz="1400" b="0" i="0">
                 <a:solidFill>
-                  <a:srgbClr val="666666"/>
+                  <a:srgbClr val="26231F"/>
                 </a:solidFill>
               </a:rPr>
               <a:t>고맙습니다 · 가족 이름</a:t>
@@ -5903,34 +6235,34 @@
         <a:sysClr val="window" lastClr="FFFFFF"/>
       </a:lt1>
       <a:dk2>
-        <a:srgbClr val="721D2B"/>
+        <a:srgbClr val="49272D"/>
       </a:dk2>
       <a:lt2>
-        <a:srgbClr val="FCF3F4"/>
+        <a:srgbClr val="FDEAED"/>
       </a:lt2>
       <a:accent1>
-        <a:srgbClr val="DF3A55"/>
+        <a:srgbClr val="ED97A5"/>
       </a:accent1>
       <a:accent2>
-        <a:srgbClr val="339941"/>
+        <a:srgbClr val="F3CBBA"/>
       </a:accent2>
       <a:accent3>
-        <a:srgbClr val="721D2B"/>
+        <a:srgbClr val="49272D"/>
       </a:accent3>
       <a:accent4>
-        <a:srgbClr val="F7D4DA"/>
+        <a:srgbClr val="FAD1D8"/>
       </a:accent4>
       <a:accent5>
-        <a:srgbClr val="896A4B"/>
+        <a:srgbClr val="F0B1B0"/>
       </a:accent5>
       <a:accent6>
-        <a:srgbClr val="AA7780"/>
+        <a:srgbClr val="927D81"/>
       </a:accent6>
       <a:hlink>
-        <a:srgbClr val="DF3A55"/>
+        <a:srgbClr val="ED97A5"/>
       </a:hlink>
       <a:folHlink>
-        <a:srgbClr val="721D2B"/>
+        <a:srgbClr val="49272D"/>
       </a:folHlink>
     </a:clrScheme>
     <a:fontScheme name="Office">
